--- a/assets/powerpoints/module-sante/C3-avoir-besoin-de.pptx
+++ b/assets/powerpoints/module-sante/C3-avoir-besoin-de.pptx
@@ -19,6 +19,7 @@
     <p:sldId id="267" r:id="rId19"/>
     <p:sldId id="268" r:id="rId20"/>
     <p:sldId id="269" r:id="rId21"/>
+    <p:sldId id="270" r:id="rId22"/>
   </p:sldIdLst>
   <p:sldSz cx="12191695" cy="6858000" type="screen4x3"/>
   <p:notesSz cx="6858000" cy="9144000"/>
@@ -585,7 +586,7 @@
           <a:lstStyle/>
           <a:p>
             <a:r>
-              <a:t>Corriger en groupe. Donner la bonne réponse, sans revenir sur qui s'est trompé.</a:t>
+              <a:t>Faire remarquer que les quatre formulations de départ sont correctes aussi. On ajoute un outil, on n'en retire pas.</a:t>
             </a:r>
           </a:p>
         </p:txBody>
@@ -655,7 +656,7 @@
           <a:lstStyle/>
           <a:p>
             <a:r>
-              <a:t>La deuxième prépare directement le courriel de E1. Le dire au groupe.</a:t>
+              <a:t>Corriger en groupe. Donner la bonne réponse, sans revenir sur qui s'est trompé.</a:t>
             </a:r>
           </a:p>
         </p:txBody>
@@ -725,7 +726,7 @@
           <a:lstStyle/>
           <a:p>
             <a:r>
-              <a:t>Corriger en groupe. Donner la bonne réponse, sans revenir sur qui s'est trompé.</a:t>
+              <a:t>La deuxième prépare directement le courriel de E1. Le dire au groupe.</a:t>
             </a:r>
           </a:p>
         </p:txBody>
@@ -795,7 +796,7 @@
           <a:lstStyle/>
           <a:p>
             <a:r>
-              <a:t>Dix minutes. Circuler et vérifier une seule chose : le « de » est-il là ? C'est le critère de la séance.</a:t>
+              <a:t>Corriger en groupe. Donner la bonne réponse, sans revenir sur qui s'est trompé.</a:t>
             </a:r>
           </a:p>
         </p:txBody>
@@ -865,6 +866,76 @@
           <a:lstStyle/>
           <a:p>
             <a:r>
+              <a:t>Dix minutes. Circuler et vérifier une seule chose : le « de » est-il là ? C'est le critère de la séance.</a:t>
+            </a:r>
+          </a:p>
+        </p:txBody>
+      </p:sp>
+      <p:sp>
+        <p:nvSpPr>
+          <p:cNvPr id="4" name="Slide Number Placeholder 3"/>
+          <p:cNvSpPr>
+            <a:spLocks noGrp="1"/>
+          </p:cNvSpPr>
+          <p:nvPr>
+            <p:ph type="sldNum" idx="5" sz="quarter"/>
+          </p:nvPr>
+        </p:nvSpPr>
+        <p:spPr/>
+      </p:sp>
+    </p:spTree>
+  </p:cSld>
+  <p:clrMapOvr>
+    <a:masterClrMapping/>
+  </p:clrMapOvr>
+</p:notes>
+</file>
+
+<file path=ppt/notesSlides/notesSlide15.xml><?xml version="1.0" encoding="utf-8"?>
+<p:notes xmlns:a="http://schemas.openxmlformats.org/drawingml/2006/main" xmlns:p="http://schemas.openxmlformats.org/presentationml/2006/main" xmlns:r="http://schemas.openxmlformats.org/officeDocument/2006/relationships">
+  <p:cSld>
+    <p:spTree>
+      <p:nvGrpSpPr>
+        <p:cNvPr id="1" name=""/>
+        <p:cNvGrpSpPr/>
+        <p:nvPr/>
+      </p:nvGrpSpPr>
+      <p:grpSpPr>
+        <a:xfrm>
+          <a:off x="0" y="0"/>
+          <a:ext cx="0" cy="0"/>
+          <a:chOff x="0" y="0"/>
+          <a:chExt cx="0" cy="0"/>
+        </a:xfrm>
+      </p:grpSpPr>
+      <p:sp>
+        <p:nvSpPr>
+          <p:cNvPr id="2" name="Slide Image Placeholder 1"/>
+          <p:cNvSpPr>
+            <a:spLocks noGrp="1"/>
+          </p:cNvSpPr>
+          <p:nvPr>
+            <p:ph type="sldImg" idx="2"/>
+          </p:nvPr>
+        </p:nvSpPr>
+        <p:spPr/>
+      </p:sp>
+      <p:sp>
+        <p:nvSpPr>
+          <p:cNvPr id="3" name="Notes Placeholder 2"/>
+          <p:cNvSpPr>
+            <a:spLocks noGrp="1"/>
+          </p:cNvSpPr>
+          <p:nvPr>
+            <p:ph type="body" idx="3" sz="quarter"/>
+          </p:nvPr>
+        </p:nvSpPr>
+        <p:spPr/>
+        <p:txBody>
+          <a:bodyPr/>
+          <a:lstStyle/>
+          <a:p>
+            <a:r>
               <a:t>Ramasser. Ces deux phrases entrent telles quelles dans le courriel de E1.</a:t>
             </a:r>
           </a:p>
@@ -1285,7 +1356,7 @@
           <a:lstStyle/>
           <a:p>
             <a:r>
-              <a:t>Erreur la plus fréquente et la plus audible. Faire répéter la bonne forme trois fois, à voix haute.</a:t>
+              <a:t>Projeter avant d'ouvrir l'activité. Faire dire à deux ou trois élèves où irait la première réponse, sans y toucher : on vérifie qu'ils ont compris la consigne, pas le contenu. Ouvrir ensuite le module sur les postes.</a:t>
             </a:r>
           </a:p>
         </p:txBody>
@@ -1355,7 +1426,7 @@
           <a:lstStyle/>
           <a:p>
             <a:r>
-              <a:t>Conjuguer les six formes au tableau : j'ai besoin, tu as besoin… Trente secondes, et ça se règle.</a:t>
+              <a:t>Erreur la plus fréquente et la plus audible. Faire répéter la bonne forme trois fois, à voix haute.</a:t>
             </a:r>
           </a:p>
         </p:txBody>
@@ -1425,7 +1496,7 @@
           <a:lstStyle/>
           <a:p>
             <a:r>
-              <a:t>Faire remarquer que les quatre formulations de départ sont correctes aussi. On ajoute un outil, on n'en retire pas.</a:t>
+              <a:t>Conjuguer les six formes au tableau : j'ai besoin, tu as besoin… Trente secondes, et ça se règle.</a:t>
             </a:r>
           </a:p>
         </p:txBody>
@@ -4847,7 +4918,7 @@
                 </a:solidFill>
                 <a:latin typeface="Verdana"/>
               </a:rPr>
-              <a:t>CORRECTION</a:t>
+              <a:t>PRATIQUE · 2 DE 4</a:t>
             </a:r>
           </a:p>
         </p:txBody>
@@ -4925,7 +4996,7 @@
                 </a:solidFill>
                 <a:latin typeface="Verdana"/>
               </a:rPr>
-              <a:t>Correction — on lit la réponse, on ne commente pas l'erreur.</a:t>
+              <a:t>Dites-le avec « avoir besoin de ».</a:t>
             </a:r>
           </a:p>
         </p:txBody>
@@ -4947,7 +5018,7 @@
             </a:avLst>
           </a:prstGeom>
           <a:solidFill>
-            <a:srgbClr val="E6F5EE"/>
+            <a:srgbClr val="FFFFFF"/>
           </a:solidFill>
           <a:ln w="12700">
             <a:solidFill>
@@ -5093,16 +5164,7 @@
                 </a:solidFill>
                 <a:latin typeface="Verdana"/>
               </a:rPr>
-              <a:t>Je voudrais un rendez-vous.   </a:t>
-            </a:r>
-            <a:r>
-              <a:rPr sz="1900" b="1" i="0">
-                <a:solidFill>
-                  <a:srgbClr val="07734A"/>
-                </a:solidFill>
-                <a:latin typeface="Verdana"/>
-              </a:rPr>
-              <a:t>» J'ai besoin d'un rendez-vous.</a:t>
+              <a:t>Je voudrais un rendez-vous.</a:t>
             </a:r>
           </a:p>
         </p:txBody>
@@ -5124,7 +5186,7 @@
             </a:avLst>
           </a:prstGeom>
           <a:solidFill>
-            <a:srgbClr val="E6F5EE"/>
+            <a:srgbClr val="FFFFFF"/>
           </a:solidFill>
           <a:ln w="12700">
             <a:solidFill>
@@ -5270,16 +5332,7 @@
                 </a:solidFill>
                 <a:latin typeface="Verdana"/>
               </a:rPr>
-              <a:t>Je dois me reposer.   </a:t>
-            </a:r>
-            <a:r>
-              <a:rPr sz="1900" b="1" i="0">
-                <a:solidFill>
-                  <a:srgbClr val="07734A"/>
-                </a:solidFill>
-                <a:latin typeface="Verdana"/>
-              </a:rPr>
-              <a:t>» J'ai besoin de me reposer.</a:t>
+              <a:t>Je dois me reposer.</a:t>
             </a:r>
           </a:p>
         </p:txBody>
@@ -5301,7 +5354,7 @@
             </a:avLst>
           </a:prstGeom>
           <a:solidFill>
-            <a:srgbClr val="E6F5EE"/>
+            <a:srgbClr val="FFFFFF"/>
           </a:solidFill>
           <a:ln w="12700">
             <a:solidFill>
@@ -5447,16 +5500,7 @@
                 </a:solidFill>
                 <a:latin typeface="Verdana"/>
               </a:rPr>
-              <a:t>Il me faut de l'aide.   </a:t>
-            </a:r>
-            <a:r>
-              <a:rPr sz="1900" b="1" i="0">
-                <a:solidFill>
-                  <a:srgbClr val="07734A"/>
-                </a:solidFill>
-                <a:latin typeface="Verdana"/>
-              </a:rPr>
-              <a:t>» J'ai besoin d'aide.</a:t>
+              <a:t>Il me faut de l'aide.</a:t>
             </a:r>
           </a:p>
         </p:txBody>
@@ -5478,7 +5522,7 @@
             </a:avLst>
           </a:prstGeom>
           <a:solidFill>
-            <a:srgbClr val="E6F5EE"/>
+            <a:srgbClr val="FFFFFF"/>
           </a:solidFill>
           <a:ln w="12700">
             <a:solidFill>
@@ -5624,16 +5668,7 @@
                 </a:solidFill>
                 <a:latin typeface="Verdana"/>
               </a:rPr>
-              <a:t>Nous voulons des explications.   </a:t>
-            </a:r>
-            <a:r>
-              <a:rPr sz="1900" b="1" i="0">
-                <a:solidFill>
-                  <a:srgbClr val="07734A"/>
-                </a:solidFill>
-                <a:latin typeface="Verdana"/>
-              </a:rPr>
-              <a:t>» Nous avons besoin d'explications.</a:t>
+              <a:t>Nous voulons des explications.</a:t>
             </a:r>
           </a:p>
         </p:txBody>
@@ -5810,7 +5845,7 @@
                 </a:solidFill>
                 <a:latin typeface="Verdana"/>
               </a:rPr>
-              <a:t>PRATIQUE · 3 DE 4</a:t>
+              <a:t>CORRECTION</a:t>
             </a:r>
           </a:p>
         </p:txBody>
@@ -5849,7 +5884,7 @@
                 </a:solidFill>
                 <a:latin typeface="Verdana"/>
               </a:rPr>
-              <a:t>Au comptoir et au téléphone</a:t>
+              <a:t>Transformez la demande</a:t>
             </a:r>
           </a:p>
         </p:txBody>
@@ -5888,7 +5923,7 @@
                 </a:solidFill>
                 <a:latin typeface="Verdana"/>
               </a:rPr>
-              <a:t>Formulez la demande complète.</a:t>
+              <a:t>Correction — on lit la réponse, on ne commente pas l'erreur.</a:t>
             </a:r>
           </a:p>
         </p:txBody>
@@ -5902,15 +5937,15 @@
         <p:spPr>
           <a:xfrm>
             <a:off x="566928" y="2139696"/>
-            <a:ext cx="11057839" cy="950976"/>
+            <a:ext cx="11057839" cy="648716"/>
           </a:xfrm>
           <a:prstGeom prst="roundRect">
             <a:avLst>
-              <a:gd name="adj" fmla="val 15384"/>
+              <a:gd name="adj" fmla="val 22552"/>
             </a:avLst>
           </a:prstGeom>
           <a:solidFill>
-            <a:srgbClr val="FFFFFF"/>
+            <a:srgbClr val="E6F5EE"/>
           </a:solidFill>
           <a:ln w="12700">
             <a:solidFill>
@@ -5947,7 +5982,7 @@
         </p:nvSpPr>
         <p:spPr>
           <a:xfrm>
-            <a:off x="841247" y="2432303"/>
+            <a:off x="841247" y="2281174"/>
             <a:ext cx="365760" cy="365760"/>
           </a:xfrm>
           <a:prstGeom prst="roundRect">
@@ -5991,7 +6026,7 @@
         </p:nvSpPr>
         <p:spPr>
           <a:xfrm>
-            <a:off x="841247" y="2496311"/>
+            <a:off x="841247" y="2345182"/>
             <a:ext cx="365760" cy="256032"/>
           </a:xfrm>
           <a:prstGeom prst="rect">
@@ -6031,7 +6066,7 @@
         <p:spPr>
           <a:xfrm>
             <a:off x="1344168" y="2295144"/>
-            <a:ext cx="10097719" cy="676656"/>
+            <a:ext cx="10097719" cy="374396"/>
           </a:xfrm>
           <a:prstGeom prst="rect">
             <a:avLst/>
@@ -6050,13 +6085,22 @@
               </a:lnSpc>
             </a:pPr>
             <a:r>
-              <a:rPr sz="1800" b="0" i="0">
+              <a:rPr sz="1900" b="0" i="0">
                 <a:solidFill>
                   <a:srgbClr val="3A3D40"/>
                 </a:solidFill>
                 <a:latin typeface="Verdana"/>
               </a:rPr>
-              <a:t>À la clinique, vous voulez voir un médecin cette semaine.</a:t>
+              <a:t>Je voudrais un rendez-vous.   </a:t>
+            </a:r>
+            <a:r>
+              <a:rPr sz="1900" b="1" i="0">
+                <a:solidFill>
+                  <a:srgbClr val="07734A"/>
+                </a:solidFill>
+                <a:latin typeface="Verdana"/>
+              </a:rPr>
+              <a:t>» J'ai besoin d'un rendez-vous.</a:t>
             </a:r>
           </a:p>
         </p:txBody>
@@ -6069,16 +6113,16 @@
         </p:nvSpPr>
         <p:spPr>
           <a:xfrm>
-            <a:off x="566928" y="3218688"/>
-            <a:ext cx="11057839" cy="950976"/>
+            <a:off x="566928" y="2916428"/>
+            <a:ext cx="11057839" cy="648716"/>
           </a:xfrm>
           <a:prstGeom prst="roundRect">
             <a:avLst>
-              <a:gd name="adj" fmla="val 15384"/>
+              <a:gd name="adj" fmla="val 22552"/>
             </a:avLst>
           </a:prstGeom>
           <a:solidFill>
-            <a:srgbClr val="FFFFFF"/>
+            <a:srgbClr val="E6F5EE"/>
           </a:solidFill>
           <a:ln w="12700">
             <a:solidFill>
@@ -6115,7 +6159,7 @@
         </p:nvSpPr>
         <p:spPr>
           <a:xfrm>
-            <a:off x="841247" y="3511296"/>
+            <a:off x="841247" y="3057905"/>
             <a:ext cx="365760" cy="365760"/>
           </a:xfrm>
           <a:prstGeom prst="roundRect">
@@ -6159,7 +6203,7 @@
         </p:nvSpPr>
         <p:spPr>
           <a:xfrm>
-            <a:off x="841247" y="3575303"/>
+            <a:off x="841247" y="3121913"/>
             <a:ext cx="365760" cy="256032"/>
           </a:xfrm>
           <a:prstGeom prst="rect">
@@ -6198,8 +6242,8 @@
         </p:nvSpPr>
         <p:spPr>
           <a:xfrm>
-            <a:off x="1344168" y="3374136"/>
-            <a:ext cx="10097719" cy="676656"/>
+            <a:off x="1344168" y="3071876"/>
+            <a:ext cx="10097719" cy="374396"/>
           </a:xfrm>
           <a:prstGeom prst="rect">
             <a:avLst/>
@@ -6218,13 +6262,22 @@
               </a:lnSpc>
             </a:pPr>
             <a:r>
-              <a:rPr sz="1800" b="0" i="0">
+              <a:rPr sz="1900" b="0" i="0">
                 <a:solidFill>
                   <a:srgbClr val="3A3D40"/>
                 </a:solidFill>
                 <a:latin typeface="Verdana"/>
               </a:rPr>
-              <a:t>À la pharmacie, votre ordonnance est terminée.</a:t>
+              <a:t>Je dois me reposer.   </a:t>
+            </a:r>
+            <a:r>
+              <a:rPr sz="1900" b="1" i="0">
+                <a:solidFill>
+                  <a:srgbClr val="07734A"/>
+                </a:solidFill>
+                <a:latin typeface="Verdana"/>
+              </a:rPr>
+              <a:t>» J'ai besoin de me reposer.</a:t>
             </a:r>
           </a:p>
         </p:txBody>
@@ -6237,16 +6290,16 @@
         </p:nvSpPr>
         <p:spPr>
           <a:xfrm>
-            <a:off x="566928" y="4297680"/>
-            <a:ext cx="11057839" cy="630936"/>
+            <a:off x="566928" y="3693160"/>
+            <a:ext cx="11057839" cy="648716"/>
           </a:xfrm>
           <a:prstGeom prst="roundRect">
             <a:avLst>
-              <a:gd name="adj" fmla="val 23188"/>
+              <a:gd name="adj" fmla="val 22552"/>
             </a:avLst>
           </a:prstGeom>
           <a:solidFill>
-            <a:srgbClr val="FFFFFF"/>
+            <a:srgbClr val="E6F5EE"/>
           </a:solidFill>
           <a:ln w="12700">
             <a:solidFill>
@@ -6283,7 +6336,7 @@
         </p:nvSpPr>
         <p:spPr>
           <a:xfrm>
-            <a:off x="841247" y="4430268"/>
+            <a:off x="841247" y="3834638"/>
             <a:ext cx="365760" cy="365760"/>
           </a:xfrm>
           <a:prstGeom prst="roundRect">
@@ -6327,7 +6380,7 @@
         </p:nvSpPr>
         <p:spPr>
           <a:xfrm>
-            <a:off x="841247" y="4494276"/>
+            <a:off x="841247" y="3898646"/>
             <a:ext cx="365760" cy="256032"/>
           </a:xfrm>
           <a:prstGeom prst="rect">
@@ -6366,8 +6419,8 @@
         </p:nvSpPr>
         <p:spPr>
           <a:xfrm>
-            <a:off x="1344168" y="4453128"/>
-            <a:ext cx="10097719" cy="356615"/>
+            <a:off x="1344168" y="3848608"/>
+            <a:ext cx="10097719" cy="374396"/>
           </a:xfrm>
           <a:prstGeom prst="rect">
             <a:avLst/>
@@ -6386,13 +6439,22 @@
               </a:lnSpc>
             </a:pPr>
             <a:r>
-              <a:rPr sz="1800" b="0" i="0">
+              <a:rPr sz="1900" b="0" i="0">
                 <a:solidFill>
                   <a:srgbClr val="3A3D40"/>
                 </a:solidFill>
                 <a:latin typeface="Verdana"/>
               </a:rPr>
-              <a:t>Au travail, vous voulez deux jours de congé.</a:t>
+              <a:t>Il me faut de l'aide.   </a:t>
+            </a:r>
+            <a:r>
+              <a:rPr sz="1900" b="1" i="0">
+                <a:solidFill>
+                  <a:srgbClr val="07734A"/>
+                </a:solidFill>
+                <a:latin typeface="Verdana"/>
+              </a:rPr>
+              <a:t>» J'ai besoin d'aide.</a:t>
             </a:r>
           </a:p>
         </p:txBody>
@@ -6405,16 +6467,16 @@
         </p:nvSpPr>
         <p:spPr>
           <a:xfrm>
-            <a:off x="566928" y="5056632"/>
-            <a:ext cx="11057839" cy="950976"/>
+            <a:off x="566928" y="4469892"/>
+            <a:ext cx="11057839" cy="648716"/>
           </a:xfrm>
           <a:prstGeom prst="roundRect">
             <a:avLst>
-              <a:gd name="adj" fmla="val 15384"/>
+              <a:gd name="adj" fmla="val 22552"/>
             </a:avLst>
           </a:prstGeom>
           <a:solidFill>
-            <a:srgbClr val="FFFFFF"/>
+            <a:srgbClr val="E6F5EE"/>
           </a:solidFill>
           <a:ln w="12700">
             <a:solidFill>
@@ -6451,7 +6513,7 @@
         </p:nvSpPr>
         <p:spPr>
           <a:xfrm>
-            <a:off x="841247" y="5349240"/>
+            <a:off x="841247" y="4611370"/>
             <a:ext cx="365760" cy="365760"/>
           </a:xfrm>
           <a:prstGeom prst="roundRect">
@@ -6495,7 +6557,7 @@
         </p:nvSpPr>
         <p:spPr>
           <a:xfrm>
-            <a:off x="841247" y="5413248"/>
+            <a:off x="841247" y="4675378"/>
             <a:ext cx="365760" cy="256032"/>
           </a:xfrm>
           <a:prstGeom prst="rect">
@@ -6534,8 +6596,8 @@
         </p:nvSpPr>
         <p:spPr>
           <a:xfrm>
-            <a:off x="1344168" y="5212080"/>
-            <a:ext cx="10097719" cy="676656"/>
+            <a:off x="1344168" y="4625340"/>
+            <a:ext cx="10097719" cy="374396"/>
           </a:xfrm>
           <a:prstGeom prst="rect">
             <a:avLst/>
@@ -6554,13 +6616,22 @@
               </a:lnSpc>
             </a:pPr>
             <a:r>
-              <a:rPr sz="1800" b="0" i="0">
+              <a:rPr sz="1900" b="0" i="0">
                 <a:solidFill>
                   <a:srgbClr val="3A3D40"/>
                 </a:solidFill>
                 <a:latin typeface="Verdana"/>
               </a:rPr>
-              <a:t>À l'accueil, vous ne comprenez pas le formulaire.</a:t>
+              <a:t>Nous voulons des explications.   </a:t>
+            </a:r>
+            <a:r>
+              <a:rPr sz="1900" b="1" i="0">
+                <a:solidFill>
+                  <a:srgbClr val="07734A"/>
+                </a:solidFill>
+                <a:latin typeface="Verdana"/>
+              </a:rPr>
+              <a:t>» Nous avons besoin d'explications.</a:t>
             </a:r>
           </a:p>
         </p:txBody>
@@ -6737,7 +6808,7 @@
                 </a:solidFill>
                 <a:latin typeface="Verdana"/>
               </a:rPr>
-              <a:t>CORRECTION</a:t>
+              <a:t>PRATIQUE · 3 DE 4</a:t>
             </a:r>
           </a:p>
         </p:txBody>
@@ -6815,7 +6886,7 @@
                 </a:solidFill>
                 <a:latin typeface="Verdana"/>
               </a:rPr>
-              <a:t>Correction — on lit la réponse, on ne commente pas l'erreur.</a:t>
+              <a:t>Formulez la demande complète.</a:t>
             </a:r>
           </a:p>
         </p:txBody>
@@ -6837,7 +6908,7 @@
             </a:avLst>
           </a:prstGeom>
           <a:solidFill>
-            <a:srgbClr val="E6F5EE"/>
+            <a:srgbClr val="FFFFFF"/>
           </a:solidFill>
           <a:ln w="12700">
             <a:solidFill>
@@ -6983,16 +7054,7 @@
                 </a:solidFill>
                 <a:latin typeface="Verdana"/>
               </a:rPr>
-              <a:t>À la clinique, vous voulez voir un médecin cette semaine.   </a:t>
-            </a:r>
-            <a:r>
-              <a:rPr sz="1800" b="1" i="0">
-                <a:solidFill>
-                  <a:srgbClr val="07734A"/>
-                </a:solidFill>
-                <a:latin typeface="Verdana"/>
-              </a:rPr>
-              <a:t>» J'ai besoin d'un rendez-vous cette semaine, s'il vous plaît.</a:t>
+              <a:t>À la clinique, vous voulez voir un médecin cette semaine.</a:t>
             </a:r>
           </a:p>
         </p:txBody>
@@ -7014,7 +7076,7 @@
             </a:avLst>
           </a:prstGeom>
           <a:solidFill>
-            <a:srgbClr val="E6F5EE"/>
+            <a:srgbClr val="FFFFFF"/>
           </a:solidFill>
           <a:ln w="12700">
             <a:solidFill>
@@ -7160,16 +7222,7 @@
                 </a:solidFill>
                 <a:latin typeface="Verdana"/>
               </a:rPr>
-              <a:t>À la pharmacie, votre ordonnance est terminée.   </a:t>
-            </a:r>
-            <a:r>
-              <a:rPr sz="1800" b="1" i="0">
-                <a:solidFill>
-                  <a:srgbClr val="07734A"/>
-                </a:solidFill>
-                <a:latin typeface="Verdana"/>
-              </a:rPr>
-              <a:t>» J'ai besoin d'un renouvellement de mon ordonnance.</a:t>
+              <a:t>À la pharmacie, votre ordonnance est terminée.</a:t>
             </a:r>
           </a:p>
         </p:txBody>
@@ -7191,7 +7244,7 @@
             </a:avLst>
           </a:prstGeom>
           <a:solidFill>
-            <a:srgbClr val="E6F5EE"/>
+            <a:srgbClr val="FFFFFF"/>
           </a:solidFill>
           <a:ln w="12700">
             <a:solidFill>
@@ -7337,16 +7390,7 @@
                 </a:solidFill>
                 <a:latin typeface="Verdana"/>
               </a:rPr>
-              <a:t>Au travail, vous voulez deux jours de congé.   </a:t>
-            </a:r>
-            <a:r>
-              <a:rPr sz="1800" b="1" i="0">
-                <a:solidFill>
-                  <a:srgbClr val="07734A"/>
-                </a:solidFill>
-                <a:latin typeface="Verdana"/>
-              </a:rPr>
-              <a:t>» J'ai besoin de me reposer deux jours.</a:t>
+              <a:t>Au travail, vous voulez deux jours de congé.</a:t>
             </a:r>
           </a:p>
         </p:txBody>
@@ -7368,7 +7412,7 @@
             </a:avLst>
           </a:prstGeom>
           <a:solidFill>
-            <a:srgbClr val="E6F5EE"/>
+            <a:srgbClr val="FFFFFF"/>
           </a:solidFill>
           <a:ln w="12700">
             <a:solidFill>
@@ -7514,16 +7558,7 @@
                 </a:solidFill>
                 <a:latin typeface="Verdana"/>
               </a:rPr>
-              <a:t>À l'accueil, vous ne comprenez pas le formulaire.   </a:t>
-            </a:r>
-            <a:r>
-              <a:rPr sz="1800" b="1" i="0">
-                <a:solidFill>
-                  <a:srgbClr val="07734A"/>
-                </a:solidFill>
-                <a:latin typeface="Verdana"/>
-              </a:rPr>
-              <a:t>» J'ai besoin d'aide pour remplir le formulaire.</a:t>
+              <a:t>À l'accueil, vous ne comprenez pas le formulaire.</a:t>
             </a:r>
           </a:p>
         </p:txBody>
@@ -7700,7 +7735,7 @@
                 </a:solidFill>
                 <a:latin typeface="Verdana"/>
               </a:rPr>
-              <a:t>PRATIQUE · 4 DE 4</a:t>
+              <a:t>CORRECTION</a:t>
             </a:r>
           </a:p>
         </p:txBody>
@@ -7739,7 +7774,7 @@
                 </a:solidFill>
                 <a:latin typeface="Verdana"/>
               </a:rPr>
-              <a:t>Vos vrais besoins</a:t>
+              <a:t>Au comptoir et au téléphone</a:t>
             </a:r>
           </a:p>
         </p:txBody>
@@ -7778,7 +7813,7 @@
                 </a:solidFill>
                 <a:latin typeface="Verdana"/>
               </a:rPr>
-              <a:t>Quatre phrases, sur vous, aujourd'hui.</a:t>
+              <a:t>Correction — on lit la réponse, on ne commente pas l'erreur.</a:t>
             </a:r>
           </a:p>
         </p:txBody>
@@ -7792,15 +7827,15 @@
         <p:spPr>
           <a:xfrm>
             <a:off x="566928" y="2139696"/>
-            <a:ext cx="11057839" cy="648716"/>
+            <a:ext cx="11057839" cy="950976"/>
           </a:xfrm>
           <a:prstGeom prst="roundRect">
             <a:avLst>
-              <a:gd name="adj" fmla="val 22552"/>
+              <a:gd name="adj" fmla="val 15384"/>
             </a:avLst>
           </a:prstGeom>
           <a:solidFill>
-            <a:srgbClr val="FFFFFF"/>
+            <a:srgbClr val="E6F5EE"/>
           </a:solidFill>
           <a:ln w="12700">
             <a:solidFill>
@@ -7837,7 +7872,7 @@
         </p:nvSpPr>
         <p:spPr>
           <a:xfrm>
-            <a:off x="841247" y="2281174"/>
+            <a:off x="841247" y="2432303"/>
             <a:ext cx="365760" cy="365760"/>
           </a:xfrm>
           <a:prstGeom prst="roundRect">
@@ -7881,7 +7916,7 @@
         </p:nvSpPr>
         <p:spPr>
           <a:xfrm>
-            <a:off x="841247" y="2345182"/>
+            <a:off x="841247" y="2496311"/>
             <a:ext cx="365760" cy="256032"/>
           </a:xfrm>
           <a:prstGeom prst="rect">
@@ -7921,7 +7956,7 @@
         <p:spPr>
           <a:xfrm>
             <a:off x="1344168" y="2295144"/>
-            <a:ext cx="10097719" cy="374396"/>
+            <a:ext cx="10097719" cy="676656"/>
           </a:xfrm>
           <a:prstGeom prst="rect">
             <a:avLst/>
@@ -7940,13 +7975,22 @@
               </a:lnSpc>
             </a:pPr>
             <a:r>
-              <a:rPr sz="1900" b="0" i="0">
+              <a:rPr sz="1800" b="0" i="0">
                 <a:solidFill>
                   <a:srgbClr val="3A3D40"/>
                 </a:solidFill>
                 <a:latin typeface="Verdana"/>
               </a:rPr>
-              <a:t>Un besoin de santé</a:t>
+              <a:t>À la clinique, vous voulez voir un médecin cette semaine.   </a:t>
+            </a:r>
+            <a:r>
+              <a:rPr sz="1800" b="1" i="0">
+                <a:solidFill>
+                  <a:srgbClr val="07734A"/>
+                </a:solidFill>
+                <a:latin typeface="Verdana"/>
+              </a:rPr>
+              <a:t>» J'ai besoin d'un rendez-vous cette semaine, s'il vous plaît.</a:t>
             </a:r>
           </a:p>
         </p:txBody>
@@ -7959,16 +8003,16 @@
         </p:nvSpPr>
         <p:spPr>
           <a:xfrm>
-            <a:off x="566928" y="2916428"/>
-            <a:ext cx="11057839" cy="648716"/>
+            <a:off x="566928" y="3218688"/>
+            <a:ext cx="11057839" cy="950976"/>
           </a:xfrm>
           <a:prstGeom prst="roundRect">
             <a:avLst>
-              <a:gd name="adj" fmla="val 22552"/>
+              <a:gd name="adj" fmla="val 15384"/>
             </a:avLst>
           </a:prstGeom>
           <a:solidFill>
-            <a:srgbClr val="FFFFFF"/>
+            <a:srgbClr val="E6F5EE"/>
           </a:solidFill>
           <a:ln w="12700">
             <a:solidFill>
@@ -8005,7 +8049,7 @@
         </p:nvSpPr>
         <p:spPr>
           <a:xfrm>
-            <a:off x="841247" y="3057905"/>
+            <a:off x="841247" y="3511296"/>
             <a:ext cx="365760" cy="365760"/>
           </a:xfrm>
           <a:prstGeom prst="roundRect">
@@ -8049,7 +8093,7 @@
         </p:nvSpPr>
         <p:spPr>
           <a:xfrm>
-            <a:off x="841247" y="3121913"/>
+            <a:off x="841247" y="3575303"/>
             <a:ext cx="365760" cy="256032"/>
           </a:xfrm>
           <a:prstGeom prst="rect">
@@ -8088,8 +8132,8 @@
         </p:nvSpPr>
         <p:spPr>
           <a:xfrm>
-            <a:off x="1344168" y="3071876"/>
-            <a:ext cx="10097719" cy="374396"/>
+            <a:off x="1344168" y="3374136"/>
+            <a:ext cx="10097719" cy="676656"/>
           </a:xfrm>
           <a:prstGeom prst="rect">
             <a:avLst/>
@@ -8108,13 +8152,22 @@
               </a:lnSpc>
             </a:pPr>
             <a:r>
-              <a:rPr sz="1900" b="0" i="0">
+              <a:rPr sz="1800" b="0" i="0">
                 <a:solidFill>
                   <a:srgbClr val="3A3D40"/>
                 </a:solidFill>
                 <a:latin typeface="Verdana"/>
               </a:rPr>
-              <a:t>Un besoin au travail</a:t>
+              <a:t>À la pharmacie, votre ordonnance est terminée.   </a:t>
+            </a:r>
+            <a:r>
+              <a:rPr sz="1800" b="1" i="0">
+                <a:solidFill>
+                  <a:srgbClr val="07734A"/>
+                </a:solidFill>
+                <a:latin typeface="Verdana"/>
+              </a:rPr>
+              <a:t>» J'ai besoin d'un renouvellement de mon ordonnance.</a:t>
             </a:r>
           </a:p>
         </p:txBody>
@@ -8127,16 +8180,16 @@
         </p:nvSpPr>
         <p:spPr>
           <a:xfrm>
-            <a:off x="566928" y="3693160"/>
-            <a:ext cx="11057839" cy="648716"/>
+            <a:off x="566928" y="4297680"/>
+            <a:ext cx="11057839" cy="630936"/>
           </a:xfrm>
           <a:prstGeom prst="roundRect">
             <a:avLst>
-              <a:gd name="adj" fmla="val 22552"/>
+              <a:gd name="adj" fmla="val 23188"/>
             </a:avLst>
           </a:prstGeom>
           <a:solidFill>
-            <a:srgbClr val="FFFFFF"/>
+            <a:srgbClr val="E6F5EE"/>
           </a:solidFill>
           <a:ln w="12700">
             <a:solidFill>
@@ -8173,7 +8226,7 @@
         </p:nvSpPr>
         <p:spPr>
           <a:xfrm>
-            <a:off x="841247" y="3834638"/>
+            <a:off x="841247" y="4430268"/>
             <a:ext cx="365760" cy="365760"/>
           </a:xfrm>
           <a:prstGeom prst="roundRect">
@@ -8217,7 +8270,7 @@
         </p:nvSpPr>
         <p:spPr>
           <a:xfrm>
-            <a:off x="841247" y="3898646"/>
+            <a:off x="841247" y="4494276"/>
             <a:ext cx="365760" cy="256032"/>
           </a:xfrm>
           <a:prstGeom prst="rect">
@@ -8256,8 +8309,8 @@
         </p:nvSpPr>
         <p:spPr>
           <a:xfrm>
-            <a:off x="1344168" y="3848608"/>
-            <a:ext cx="10097719" cy="374396"/>
+            <a:off x="1344168" y="4453128"/>
+            <a:ext cx="10097719" cy="356615"/>
           </a:xfrm>
           <a:prstGeom prst="rect">
             <a:avLst/>
@@ -8276,13 +8329,22 @@
               </a:lnSpc>
             </a:pPr>
             <a:r>
-              <a:rPr sz="1900" b="0" i="0">
+              <a:rPr sz="1800" b="0" i="0">
                 <a:solidFill>
                   <a:srgbClr val="3A3D40"/>
                 </a:solidFill>
                 <a:latin typeface="Verdana"/>
               </a:rPr>
-              <a:t>Un besoin pour vos études</a:t>
+              <a:t>Au travail, vous voulez deux jours de congé.   </a:t>
+            </a:r>
+            <a:r>
+              <a:rPr sz="1800" b="1" i="0">
+                <a:solidFill>
+                  <a:srgbClr val="07734A"/>
+                </a:solidFill>
+                <a:latin typeface="Verdana"/>
+              </a:rPr>
+              <a:t>» J'ai besoin de me reposer deux jours.</a:t>
             </a:r>
           </a:p>
         </p:txBody>
@@ -8295,16 +8357,16 @@
         </p:nvSpPr>
         <p:spPr>
           <a:xfrm>
-            <a:off x="566928" y="4469892"/>
-            <a:ext cx="11057839" cy="648716"/>
+            <a:off x="566928" y="5056632"/>
+            <a:ext cx="11057839" cy="950976"/>
           </a:xfrm>
           <a:prstGeom prst="roundRect">
             <a:avLst>
-              <a:gd name="adj" fmla="val 22552"/>
+              <a:gd name="adj" fmla="val 15384"/>
             </a:avLst>
           </a:prstGeom>
           <a:solidFill>
-            <a:srgbClr val="FFFFFF"/>
+            <a:srgbClr val="E6F5EE"/>
           </a:solidFill>
           <a:ln w="12700">
             <a:solidFill>
@@ -8341,7 +8403,7 @@
         </p:nvSpPr>
         <p:spPr>
           <a:xfrm>
-            <a:off x="841247" y="4611370"/>
+            <a:off x="841247" y="5349240"/>
             <a:ext cx="365760" cy="365760"/>
           </a:xfrm>
           <a:prstGeom prst="roundRect">
@@ -8385,7 +8447,7 @@
         </p:nvSpPr>
         <p:spPr>
           <a:xfrm>
-            <a:off x="841247" y="4675378"/>
+            <a:off x="841247" y="5413248"/>
             <a:ext cx="365760" cy="256032"/>
           </a:xfrm>
           <a:prstGeom prst="rect">
@@ -8424,8 +8486,8 @@
         </p:nvSpPr>
         <p:spPr>
           <a:xfrm>
-            <a:off x="1344168" y="4625340"/>
-            <a:ext cx="10097719" cy="374396"/>
+            <a:off x="1344168" y="5212080"/>
+            <a:ext cx="10097719" cy="676656"/>
           </a:xfrm>
           <a:prstGeom prst="rect">
             <a:avLst/>
@@ -8444,13 +8506,22 @@
               </a:lnSpc>
             </a:pPr>
             <a:r>
-              <a:rPr sz="1900" b="0" i="0">
+              <a:rPr sz="1800" b="0" i="0">
                 <a:solidFill>
                   <a:srgbClr val="3A3D40"/>
                 </a:solidFill>
                 <a:latin typeface="Verdana"/>
               </a:rPr>
-              <a:t>Un besoin pour votre famille</a:t>
+              <a:t>À l'accueil, vous ne comprenez pas le formulaire.   </a:t>
+            </a:r>
+            <a:r>
+              <a:rPr sz="1800" b="1" i="0">
+                <a:solidFill>
+                  <a:srgbClr val="07734A"/>
+                </a:solidFill>
+                <a:latin typeface="Verdana"/>
+              </a:rPr>
+              <a:t>» J'ai besoin d'aide pour remplir le formulaire.</a:t>
             </a:r>
           </a:p>
         </p:txBody>
@@ -8595,6 +8666,933 @@
       </p:sp>
       <p:sp>
         <p:nvSpPr>
+          <p:cNvPr id="5" name="TextBox 4"/>
+          <p:cNvSpPr txBox="1"/>
+          <p:nvPr/>
+        </p:nvSpPr>
+        <p:spPr>
+          <a:xfrm>
+            <a:off x="566928" y="420624"/>
+            <a:ext cx="11057839" cy="237744"/>
+          </a:xfrm>
+          <a:prstGeom prst="rect">
+            <a:avLst/>
+          </a:prstGeom>
+          <a:noFill/>
+        </p:spPr>
+        <p:txBody>
+          <a:bodyPr wrap="square" lIns="0" rIns="0" tIns="0" bIns="0" anchor="t">
+            <a:spAutoFit/>
+          </a:bodyPr>
+          <a:lstStyle/>
+          <a:p>
+            <a:pPr algn="l">
+              <a:lnSpc>
+                <a:spcPct val="135000"/>
+              </a:lnSpc>
+            </a:pPr>
+            <a:r>
+              <a:rPr sz="1300" b="1" i="0" spc="156">
+                <a:solidFill>
+                  <a:srgbClr val="0D7A6F"/>
+                </a:solidFill>
+                <a:latin typeface="Verdana"/>
+              </a:rPr>
+              <a:t>PRATIQUE · 4 DE 4</a:t>
+            </a:r>
+          </a:p>
+        </p:txBody>
+      </p:sp>
+      <p:sp>
+        <p:nvSpPr>
+          <p:cNvPr id="6" name="TextBox 5"/>
+          <p:cNvSpPr txBox="1"/>
+          <p:nvPr/>
+        </p:nvSpPr>
+        <p:spPr>
+          <a:xfrm>
+            <a:off x="566928" y="749808"/>
+            <a:ext cx="11057839" cy="877824"/>
+          </a:xfrm>
+          <a:prstGeom prst="rect">
+            <a:avLst/>
+          </a:prstGeom>
+          <a:noFill/>
+        </p:spPr>
+        <p:txBody>
+          <a:bodyPr wrap="square" lIns="0" rIns="0" tIns="0" bIns="0" anchor="t">
+            <a:spAutoFit/>
+          </a:bodyPr>
+          <a:lstStyle/>
+          <a:p>
+            <a:pPr algn="l">
+              <a:lnSpc>
+                <a:spcPct val="115000"/>
+              </a:lnSpc>
+            </a:pPr>
+            <a:r>
+              <a:rPr sz="3400" b="1" i="0">
+                <a:solidFill>
+                  <a:srgbClr val="17181A"/>
+                </a:solidFill>
+                <a:latin typeface="Verdana"/>
+              </a:rPr>
+              <a:t>Vos vrais besoins</a:t>
+            </a:r>
+          </a:p>
+        </p:txBody>
+      </p:sp>
+      <p:sp>
+        <p:nvSpPr>
+          <p:cNvPr id="7" name="TextBox 6"/>
+          <p:cNvSpPr txBox="1"/>
+          <p:nvPr/>
+        </p:nvSpPr>
+        <p:spPr>
+          <a:xfrm>
+            <a:off x="566928" y="1645920"/>
+            <a:ext cx="11057839" cy="329184"/>
+          </a:xfrm>
+          <a:prstGeom prst="rect">
+            <a:avLst/>
+          </a:prstGeom>
+          <a:noFill/>
+        </p:spPr>
+        <p:txBody>
+          <a:bodyPr wrap="square" lIns="0" rIns="0" tIns="0" bIns="0" anchor="t">
+            <a:spAutoFit/>
+          </a:bodyPr>
+          <a:lstStyle/>
+          <a:p>
+            <a:pPr algn="l">
+              <a:lnSpc>
+                <a:spcPct val="135000"/>
+              </a:lnSpc>
+            </a:pPr>
+            <a:r>
+              <a:rPr sz="1800" b="0" i="0">
+                <a:solidFill>
+                  <a:srgbClr val="6E7175"/>
+                </a:solidFill>
+                <a:latin typeface="Verdana"/>
+              </a:rPr>
+              <a:t>Quatre phrases, sur vous, aujourd'hui.</a:t>
+            </a:r>
+          </a:p>
+        </p:txBody>
+      </p:sp>
+      <p:sp>
+        <p:nvSpPr>
+          <p:cNvPr id="8" name="Rounded Rectangle 7"/>
+          <p:cNvSpPr/>
+          <p:nvPr/>
+        </p:nvSpPr>
+        <p:spPr>
+          <a:xfrm>
+            <a:off x="566928" y="2139696"/>
+            <a:ext cx="11057839" cy="648716"/>
+          </a:xfrm>
+          <a:prstGeom prst="roundRect">
+            <a:avLst>
+              <a:gd name="adj" fmla="val 22552"/>
+            </a:avLst>
+          </a:prstGeom>
+          <a:solidFill>
+            <a:srgbClr val="FFFFFF"/>
+          </a:solidFill>
+          <a:ln w="12700">
+            <a:solidFill>
+              <a:srgbClr val="EAEAE8"/>
+            </a:solidFill>
+          </a:ln>
+          <a:effectLst/>
+        </p:spPr>
+        <p:style>
+          <a:lnRef idx="1">
+            <a:schemeClr val="accent1"/>
+          </a:lnRef>
+          <a:fillRef idx="3">
+            <a:schemeClr val="accent1"/>
+          </a:fillRef>
+          <a:effectRef idx="2">
+            <a:schemeClr val="accent1"/>
+          </a:effectRef>
+          <a:fontRef idx="minor">
+            <a:schemeClr val="lt1"/>
+          </a:fontRef>
+        </p:style>
+        <p:txBody>
+          <a:bodyPr rtlCol="0" anchor="ctr"/>
+          <a:lstStyle/>
+          <a:p/>
+        </p:txBody>
+      </p:sp>
+      <p:sp>
+        <p:nvSpPr>
+          <p:cNvPr id="9" name="Rounded Rectangle 8"/>
+          <p:cNvSpPr/>
+          <p:nvPr/>
+        </p:nvSpPr>
+        <p:spPr>
+          <a:xfrm>
+            <a:off x="841247" y="2281174"/>
+            <a:ext cx="365760" cy="365760"/>
+          </a:xfrm>
+          <a:prstGeom prst="roundRect">
+            <a:avLst>
+              <a:gd name="adj" fmla="val 32500"/>
+            </a:avLst>
+          </a:prstGeom>
+          <a:solidFill>
+            <a:srgbClr val="DCF2EF"/>
+          </a:solidFill>
+          <a:ln>
+            <a:noFill/>
+          </a:ln>
+          <a:effectLst/>
+        </p:spPr>
+        <p:style>
+          <a:lnRef idx="1">
+            <a:schemeClr val="accent1"/>
+          </a:lnRef>
+          <a:fillRef idx="3">
+            <a:schemeClr val="accent1"/>
+          </a:fillRef>
+          <a:effectRef idx="2">
+            <a:schemeClr val="accent1"/>
+          </a:effectRef>
+          <a:fontRef idx="minor">
+            <a:schemeClr val="lt1"/>
+          </a:fontRef>
+        </p:style>
+        <p:txBody>
+          <a:bodyPr rtlCol="0" anchor="ctr"/>
+          <a:lstStyle/>
+          <a:p/>
+        </p:txBody>
+      </p:sp>
+      <p:sp>
+        <p:nvSpPr>
+          <p:cNvPr id="10" name="TextBox 9"/>
+          <p:cNvSpPr txBox="1"/>
+          <p:nvPr/>
+        </p:nvSpPr>
+        <p:spPr>
+          <a:xfrm>
+            <a:off x="841247" y="2345182"/>
+            <a:ext cx="365760" cy="256032"/>
+          </a:xfrm>
+          <a:prstGeom prst="rect">
+            <a:avLst/>
+          </a:prstGeom>
+          <a:noFill/>
+        </p:spPr>
+        <p:txBody>
+          <a:bodyPr wrap="square" lIns="0" rIns="0" tIns="0" bIns="0" anchor="t">
+            <a:spAutoFit/>
+          </a:bodyPr>
+          <a:lstStyle/>
+          <a:p>
+            <a:pPr algn="ctr">
+              <a:lnSpc>
+                <a:spcPct val="135000"/>
+              </a:lnSpc>
+            </a:pPr>
+            <a:r>
+              <a:rPr sz="1500" b="1" i="0">
+                <a:solidFill>
+                  <a:srgbClr val="0D7A6F"/>
+                </a:solidFill>
+                <a:latin typeface="Verdana"/>
+              </a:rPr>
+              <a:t>1</a:t>
+            </a:r>
+          </a:p>
+        </p:txBody>
+      </p:sp>
+      <p:sp>
+        <p:nvSpPr>
+          <p:cNvPr id="11" name="TextBox 10"/>
+          <p:cNvSpPr txBox="1"/>
+          <p:nvPr/>
+        </p:nvSpPr>
+        <p:spPr>
+          <a:xfrm>
+            <a:off x="1344168" y="2295144"/>
+            <a:ext cx="10097719" cy="374396"/>
+          </a:xfrm>
+          <a:prstGeom prst="rect">
+            <a:avLst/>
+          </a:prstGeom>
+          <a:noFill/>
+        </p:spPr>
+        <p:txBody>
+          <a:bodyPr wrap="square" lIns="0" rIns="0" tIns="0" bIns="0" anchor="t">
+            <a:spAutoFit/>
+          </a:bodyPr>
+          <a:lstStyle/>
+          <a:p>
+            <a:pPr algn="l">
+              <a:lnSpc>
+                <a:spcPct val="140000"/>
+              </a:lnSpc>
+            </a:pPr>
+            <a:r>
+              <a:rPr sz="1900" b="0" i="0">
+                <a:solidFill>
+                  <a:srgbClr val="3A3D40"/>
+                </a:solidFill>
+                <a:latin typeface="Verdana"/>
+              </a:rPr>
+              <a:t>Un besoin de santé</a:t>
+            </a:r>
+          </a:p>
+        </p:txBody>
+      </p:sp>
+      <p:sp>
+        <p:nvSpPr>
+          <p:cNvPr id="12" name="Rounded Rectangle 11"/>
+          <p:cNvSpPr/>
+          <p:nvPr/>
+        </p:nvSpPr>
+        <p:spPr>
+          <a:xfrm>
+            <a:off x="566928" y="2916428"/>
+            <a:ext cx="11057839" cy="648716"/>
+          </a:xfrm>
+          <a:prstGeom prst="roundRect">
+            <a:avLst>
+              <a:gd name="adj" fmla="val 22552"/>
+            </a:avLst>
+          </a:prstGeom>
+          <a:solidFill>
+            <a:srgbClr val="FFFFFF"/>
+          </a:solidFill>
+          <a:ln w="12700">
+            <a:solidFill>
+              <a:srgbClr val="EAEAE8"/>
+            </a:solidFill>
+          </a:ln>
+          <a:effectLst/>
+        </p:spPr>
+        <p:style>
+          <a:lnRef idx="1">
+            <a:schemeClr val="accent1"/>
+          </a:lnRef>
+          <a:fillRef idx="3">
+            <a:schemeClr val="accent1"/>
+          </a:fillRef>
+          <a:effectRef idx="2">
+            <a:schemeClr val="accent1"/>
+          </a:effectRef>
+          <a:fontRef idx="minor">
+            <a:schemeClr val="lt1"/>
+          </a:fontRef>
+        </p:style>
+        <p:txBody>
+          <a:bodyPr rtlCol="0" anchor="ctr"/>
+          <a:lstStyle/>
+          <a:p/>
+        </p:txBody>
+      </p:sp>
+      <p:sp>
+        <p:nvSpPr>
+          <p:cNvPr id="13" name="Rounded Rectangle 12"/>
+          <p:cNvSpPr/>
+          <p:nvPr/>
+        </p:nvSpPr>
+        <p:spPr>
+          <a:xfrm>
+            <a:off x="841247" y="3057905"/>
+            <a:ext cx="365760" cy="365760"/>
+          </a:xfrm>
+          <a:prstGeom prst="roundRect">
+            <a:avLst>
+              <a:gd name="adj" fmla="val 32500"/>
+            </a:avLst>
+          </a:prstGeom>
+          <a:solidFill>
+            <a:srgbClr val="DCF2EF"/>
+          </a:solidFill>
+          <a:ln>
+            <a:noFill/>
+          </a:ln>
+          <a:effectLst/>
+        </p:spPr>
+        <p:style>
+          <a:lnRef idx="1">
+            <a:schemeClr val="accent1"/>
+          </a:lnRef>
+          <a:fillRef idx="3">
+            <a:schemeClr val="accent1"/>
+          </a:fillRef>
+          <a:effectRef idx="2">
+            <a:schemeClr val="accent1"/>
+          </a:effectRef>
+          <a:fontRef idx="minor">
+            <a:schemeClr val="lt1"/>
+          </a:fontRef>
+        </p:style>
+        <p:txBody>
+          <a:bodyPr rtlCol="0" anchor="ctr"/>
+          <a:lstStyle/>
+          <a:p/>
+        </p:txBody>
+      </p:sp>
+      <p:sp>
+        <p:nvSpPr>
+          <p:cNvPr id="14" name="TextBox 13"/>
+          <p:cNvSpPr txBox="1"/>
+          <p:nvPr/>
+        </p:nvSpPr>
+        <p:spPr>
+          <a:xfrm>
+            <a:off x="841247" y="3121913"/>
+            <a:ext cx="365760" cy="256032"/>
+          </a:xfrm>
+          <a:prstGeom prst="rect">
+            <a:avLst/>
+          </a:prstGeom>
+          <a:noFill/>
+        </p:spPr>
+        <p:txBody>
+          <a:bodyPr wrap="square" lIns="0" rIns="0" tIns="0" bIns="0" anchor="t">
+            <a:spAutoFit/>
+          </a:bodyPr>
+          <a:lstStyle/>
+          <a:p>
+            <a:pPr algn="ctr">
+              <a:lnSpc>
+                <a:spcPct val="135000"/>
+              </a:lnSpc>
+            </a:pPr>
+            <a:r>
+              <a:rPr sz="1500" b="1" i="0">
+                <a:solidFill>
+                  <a:srgbClr val="0D7A6F"/>
+                </a:solidFill>
+                <a:latin typeface="Verdana"/>
+              </a:rPr>
+              <a:t>2</a:t>
+            </a:r>
+          </a:p>
+        </p:txBody>
+      </p:sp>
+      <p:sp>
+        <p:nvSpPr>
+          <p:cNvPr id="15" name="TextBox 14"/>
+          <p:cNvSpPr txBox="1"/>
+          <p:nvPr/>
+        </p:nvSpPr>
+        <p:spPr>
+          <a:xfrm>
+            <a:off x="1344168" y="3071876"/>
+            <a:ext cx="10097719" cy="374396"/>
+          </a:xfrm>
+          <a:prstGeom prst="rect">
+            <a:avLst/>
+          </a:prstGeom>
+          <a:noFill/>
+        </p:spPr>
+        <p:txBody>
+          <a:bodyPr wrap="square" lIns="0" rIns="0" tIns="0" bIns="0" anchor="t">
+            <a:spAutoFit/>
+          </a:bodyPr>
+          <a:lstStyle/>
+          <a:p>
+            <a:pPr algn="l">
+              <a:lnSpc>
+                <a:spcPct val="140000"/>
+              </a:lnSpc>
+            </a:pPr>
+            <a:r>
+              <a:rPr sz="1900" b="0" i="0">
+                <a:solidFill>
+                  <a:srgbClr val="3A3D40"/>
+                </a:solidFill>
+                <a:latin typeface="Verdana"/>
+              </a:rPr>
+              <a:t>Un besoin au travail</a:t>
+            </a:r>
+          </a:p>
+        </p:txBody>
+      </p:sp>
+      <p:sp>
+        <p:nvSpPr>
+          <p:cNvPr id="16" name="Rounded Rectangle 15"/>
+          <p:cNvSpPr/>
+          <p:nvPr/>
+        </p:nvSpPr>
+        <p:spPr>
+          <a:xfrm>
+            <a:off x="566928" y="3693160"/>
+            <a:ext cx="11057839" cy="648716"/>
+          </a:xfrm>
+          <a:prstGeom prst="roundRect">
+            <a:avLst>
+              <a:gd name="adj" fmla="val 22552"/>
+            </a:avLst>
+          </a:prstGeom>
+          <a:solidFill>
+            <a:srgbClr val="FFFFFF"/>
+          </a:solidFill>
+          <a:ln w="12700">
+            <a:solidFill>
+              <a:srgbClr val="EAEAE8"/>
+            </a:solidFill>
+          </a:ln>
+          <a:effectLst/>
+        </p:spPr>
+        <p:style>
+          <a:lnRef idx="1">
+            <a:schemeClr val="accent1"/>
+          </a:lnRef>
+          <a:fillRef idx="3">
+            <a:schemeClr val="accent1"/>
+          </a:fillRef>
+          <a:effectRef idx="2">
+            <a:schemeClr val="accent1"/>
+          </a:effectRef>
+          <a:fontRef idx="minor">
+            <a:schemeClr val="lt1"/>
+          </a:fontRef>
+        </p:style>
+        <p:txBody>
+          <a:bodyPr rtlCol="0" anchor="ctr"/>
+          <a:lstStyle/>
+          <a:p/>
+        </p:txBody>
+      </p:sp>
+      <p:sp>
+        <p:nvSpPr>
+          <p:cNvPr id="17" name="Rounded Rectangle 16"/>
+          <p:cNvSpPr/>
+          <p:nvPr/>
+        </p:nvSpPr>
+        <p:spPr>
+          <a:xfrm>
+            <a:off x="841247" y="3834638"/>
+            <a:ext cx="365760" cy="365760"/>
+          </a:xfrm>
+          <a:prstGeom prst="roundRect">
+            <a:avLst>
+              <a:gd name="adj" fmla="val 32500"/>
+            </a:avLst>
+          </a:prstGeom>
+          <a:solidFill>
+            <a:srgbClr val="DCF2EF"/>
+          </a:solidFill>
+          <a:ln>
+            <a:noFill/>
+          </a:ln>
+          <a:effectLst/>
+        </p:spPr>
+        <p:style>
+          <a:lnRef idx="1">
+            <a:schemeClr val="accent1"/>
+          </a:lnRef>
+          <a:fillRef idx="3">
+            <a:schemeClr val="accent1"/>
+          </a:fillRef>
+          <a:effectRef idx="2">
+            <a:schemeClr val="accent1"/>
+          </a:effectRef>
+          <a:fontRef idx="minor">
+            <a:schemeClr val="lt1"/>
+          </a:fontRef>
+        </p:style>
+        <p:txBody>
+          <a:bodyPr rtlCol="0" anchor="ctr"/>
+          <a:lstStyle/>
+          <a:p/>
+        </p:txBody>
+      </p:sp>
+      <p:sp>
+        <p:nvSpPr>
+          <p:cNvPr id="18" name="TextBox 17"/>
+          <p:cNvSpPr txBox="1"/>
+          <p:nvPr/>
+        </p:nvSpPr>
+        <p:spPr>
+          <a:xfrm>
+            <a:off x="841247" y="3898646"/>
+            <a:ext cx="365760" cy="256032"/>
+          </a:xfrm>
+          <a:prstGeom prst="rect">
+            <a:avLst/>
+          </a:prstGeom>
+          <a:noFill/>
+        </p:spPr>
+        <p:txBody>
+          <a:bodyPr wrap="square" lIns="0" rIns="0" tIns="0" bIns="0" anchor="t">
+            <a:spAutoFit/>
+          </a:bodyPr>
+          <a:lstStyle/>
+          <a:p>
+            <a:pPr algn="ctr">
+              <a:lnSpc>
+                <a:spcPct val="135000"/>
+              </a:lnSpc>
+            </a:pPr>
+            <a:r>
+              <a:rPr sz="1500" b="1" i="0">
+                <a:solidFill>
+                  <a:srgbClr val="0D7A6F"/>
+                </a:solidFill>
+                <a:latin typeface="Verdana"/>
+              </a:rPr>
+              <a:t>3</a:t>
+            </a:r>
+          </a:p>
+        </p:txBody>
+      </p:sp>
+      <p:sp>
+        <p:nvSpPr>
+          <p:cNvPr id="19" name="TextBox 18"/>
+          <p:cNvSpPr txBox="1"/>
+          <p:nvPr/>
+        </p:nvSpPr>
+        <p:spPr>
+          <a:xfrm>
+            <a:off x="1344168" y="3848608"/>
+            <a:ext cx="10097719" cy="374396"/>
+          </a:xfrm>
+          <a:prstGeom prst="rect">
+            <a:avLst/>
+          </a:prstGeom>
+          <a:noFill/>
+        </p:spPr>
+        <p:txBody>
+          <a:bodyPr wrap="square" lIns="0" rIns="0" tIns="0" bIns="0" anchor="t">
+            <a:spAutoFit/>
+          </a:bodyPr>
+          <a:lstStyle/>
+          <a:p>
+            <a:pPr algn="l">
+              <a:lnSpc>
+                <a:spcPct val="140000"/>
+              </a:lnSpc>
+            </a:pPr>
+            <a:r>
+              <a:rPr sz="1900" b="0" i="0">
+                <a:solidFill>
+                  <a:srgbClr val="3A3D40"/>
+                </a:solidFill>
+                <a:latin typeface="Verdana"/>
+              </a:rPr>
+              <a:t>Un besoin pour vos études</a:t>
+            </a:r>
+          </a:p>
+        </p:txBody>
+      </p:sp>
+      <p:sp>
+        <p:nvSpPr>
+          <p:cNvPr id="20" name="Rounded Rectangle 19"/>
+          <p:cNvSpPr/>
+          <p:nvPr/>
+        </p:nvSpPr>
+        <p:spPr>
+          <a:xfrm>
+            <a:off x="566928" y="4469892"/>
+            <a:ext cx="11057839" cy="648716"/>
+          </a:xfrm>
+          <a:prstGeom prst="roundRect">
+            <a:avLst>
+              <a:gd name="adj" fmla="val 22552"/>
+            </a:avLst>
+          </a:prstGeom>
+          <a:solidFill>
+            <a:srgbClr val="FFFFFF"/>
+          </a:solidFill>
+          <a:ln w="12700">
+            <a:solidFill>
+              <a:srgbClr val="EAEAE8"/>
+            </a:solidFill>
+          </a:ln>
+          <a:effectLst/>
+        </p:spPr>
+        <p:style>
+          <a:lnRef idx="1">
+            <a:schemeClr val="accent1"/>
+          </a:lnRef>
+          <a:fillRef idx="3">
+            <a:schemeClr val="accent1"/>
+          </a:fillRef>
+          <a:effectRef idx="2">
+            <a:schemeClr val="accent1"/>
+          </a:effectRef>
+          <a:fontRef idx="minor">
+            <a:schemeClr val="lt1"/>
+          </a:fontRef>
+        </p:style>
+        <p:txBody>
+          <a:bodyPr rtlCol="0" anchor="ctr"/>
+          <a:lstStyle/>
+          <a:p/>
+        </p:txBody>
+      </p:sp>
+      <p:sp>
+        <p:nvSpPr>
+          <p:cNvPr id="21" name="Rounded Rectangle 20"/>
+          <p:cNvSpPr/>
+          <p:nvPr/>
+        </p:nvSpPr>
+        <p:spPr>
+          <a:xfrm>
+            <a:off x="841247" y="4611370"/>
+            <a:ext cx="365760" cy="365760"/>
+          </a:xfrm>
+          <a:prstGeom prst="roundRect">
+            <a:avLst>
+              <a:gd name="adj" fmla="val 32500"/>
+            </a:avLst>
+          </a:prstGeom>
+          <a:solidFill>
+            <a:srgbClr val="DCF2EF"/>
+          </a:solidFill>
+          <a:ln>
+            <a:noFill/>
+          </a:ln>
+          <a:effectLst/>
+        </p:spPr>
+        <p:style>
+          <a:lnRef idx="1">
+            <a:schemeClr val="accent1"/>
+          </a:lnRef>
+          <a:fillRef idx="3">
+            <a:schemeClr val="accent1"/>
+          </a:fillRef>
+          <a:effectRef idx="2">
+            <a:schemeClr val="accent1"/>
+          </a:effectRef>
+          <a:fontRef idx="minor">
+            <a:schemeClr val="lt1"/>
+          </a:fontRef>
+        </p:style>
+        <p:txBody>
+          <a:bodyPr rtlCol="0" anchor="ctr"/>
+          <a:lstStyle/>
+          <a:p/>
+        </p:txBody>
+      </p:sp>
+      <p:sp>
+        <p:nvSpPr>
+          <p:cNvPr id="22" name="TextBox 21"/>
+          <p:cNvSpPr txBox="1"/>
+          <p:nvPr/>
+        </p:nvSpPr>
+        <p:spPr>
+          <a:xfrm>
+            <a:off x="841247" y="4675378"/>
+            <a:ext cx="365760" cy="256032"/>
+          </a:xfrm>
+          <a:prstGeom prst="rect">
+            <a:avLst/>
+          </a:prstGeom>
+          <a:noFill/>
+        </p:spPr>
+        <p:txBody>
+          <a:bodyPr wrap="square" lIns="0" rIns="0" tIns="0" bIns="0" anchor="t">
+            <a:spAutoFit/>
+          </a:bodyPr>
+          <a:lstStyle/>
+          <a:p>
+            <a:pPr algn="ctr">
+              <a:lnSpc>
+                <a:spcPct val="135000"/>
+              </a:lnSpc>
+            </a:pPr>
+            <a:r>
+              <a:rPr sz="1500" b="1" i="0">
+                <a:solidFill>
+                  <a:srgbClr val="0D7A6F"/>
+                </a:solidFill>
+                <a:latin typeface="Verdana"/>
+              </a:rPr>
+              <a:t>4</a:t>
+            </a:r>
+          </a:p>
+        </p:txBody>
+      </p:sp>
+      <p:sp>
+        <p:nvSpPr>
+          <p:cNvPr id="23" name="TextBox 22"/>
+          <p:cNvSpPr txBox="1"/>
+          <p:nvPr/>
+        </p:nvSpPr>
+        <p:spPr>
+          <a:xfrm>
+            <a:off x="1344168" y="4625340"/>
+            <a:ext cx="10097719" cy="374396"/>
+          </a:xfrm>
+          <a:prstGeom prst="rect">
+            <a:avLst/>
+          </a:prstGeom>
+          <a:noFill/>
+        </p:spPr>
+        <p:txBody>
+          <a:bodyPr wrap="square" lIns="0" rIns="0" tIns="0" bIns="0" anchor="t">
+            <a:spAutoFit/>
+          </a:bodyPr>
+          <a:lstStyle/>
+          <a:p>
+            <a:pPr algn="l">
+              <a:lnSpc>
+                <a:spcPct val="140000"/>
+              </a:lnSpc>
+            </a:pPr>
+            <a:r>
+              <a:rPr sz="1900" b="0" i="0">
+                <a:solidFill>
+                  <a:srgbClr val="3A3D40"/>
+                </a:solidFill>
+                <a:latin typeface="Verdana"/>
+              </a:rPr>
+              <a:t>Un besoin pour votre famille</a:t>
+            </a:r>
+          </a:p>
+        </p:txBody>
+      </p:sp>
+    </p:spTree>
+  </p:cSld>
+  <p:clrMapOvr>
+    <a:masterClrMapping/>
+  </p:clrMapOvr>
+</p:sld>
+</file>
+
+<file path=ppt/slides/slide15.xml><?xml version="1.0" encoding="utf-8"?>
+<p:sld xmlns:a="http://schemas.openxmlformats.org/drawingml/2006/main" xmlns:p="http://schemas.openxmlformats.org/presentationml/2006/main" xmlns:r="http://schemas.openxmlformats.org/officeDocument/2006/relationships">
+  <p:cSld>
+    <p:spTree>
+      <p:nvGrpSpPr>
+        <p:cNvPr id="1" name=""/>
+        <p:cNvGrpSpPr/>
+        <p:nvPr/>
+      </p:nvGrpSpPr>
+      <p:grpSpPr/>
+      <p:sp>
+        <p:nvSpPr>
+          <p:cNvPr id="2" name="Rectangle 1"/>
+          <p:cNvSpPr/>
+          <p:nvPr/>
+        </p:nvSpPr>
+        <p:spPr>
+          <a:xfrm>
+            <a:off x="0" y="0"/>
+            <a:ext cx="12191695" cy="6858000"/>
+          </a:xfrm>
+          <a:prstGeom prst="rect">
+            <a:avLst/>
+          </a:prstGeom>
+          <a:solidFill>
+            <a:srgbClr val="F7F7F5"/>
+          </a:solidFill>
+          <a:ln>
+            <a:noFill/>
+          </a:ln>
+          <a:effectLst/>
+        </p:spPr>
+        <p:style>
+          <a:lnRef idx="1">
+            <a:schemeClr val="accent1"/>
+          </a:lnRef>
+          <a:fillRef idx="3">
+            <a:schemeClr val="accent1"/>
+          </a:fillRef>
+          <a:effectRef idx="2">
+            <a:schemeClr val="accent1"/>
+          </a:effectRef>
+          <a:fontRef idx="minor">
+            <a:schemeClr val="lt1"/>
+          </a:fontRef>
+        </p:style>
+        <p:txBody>
+          <a:bodyPr rtlCol="0" anchor="ctr"/>
+          <a:lstStyle/>
+          <a:p/>
+        </p:txBody>
+      </p:sp>
+      <p:sp>
+        <p:nvSpPr>
+          <p:cNvPr id="3" name="TextBox 2"/>
+          <p:cNvSpPr txBox="1"/>
+          <p:nvPr/>
+        </p:nvSpPr>
+        <p:spPr>
+          <a:xfrm>
+            <a:off x="566928" y="6355080"/>
+            <a:ext cx="6400800" cy="219456"/>
+          </a:xfrm>
+          <a:prstGeom prst="rect">
+            <a:avLst/>
+          </a:prstGeom>
+          <a:noFill/>
+        </p:spPr>
+        <p:txBody>
+          <a:bodyPr wrap="square" lIns="0" rIns="0" tIns="0" bIns="0" anchor="t">
+            <a:spAutoFit/>
+          </a:bodyPr>
+          <a:lstStyle/>
+          <a:p>
+            <a:pPr algn="l">
+              <a:lnSpc>
+                <a:spcPct val="135000"/>
+              </a:lnSpc>
+            </a:pPr>
+            <a:r>
+              <a:rPr sz="1200" b="0" i="0">
+                <a:solidFill>
+                  <a:srgbClr val="6E7175"/>
+                </a:solidFill>
+                <a:latin typeface="Verdana"/>
+              </a:rPr>
+              <a:t>C3 · Prendre rendez-vous et aller à la pharmacie</a:t>
+            </a:r>
+          </a:p>
+        </p:txBody>
+      </p:sp>
+      <p:sp>
+        <p:nvSpPr>
+          <p:cNvPr id="4" name="TextBox 3"/>
+          <p:cNvSpPr txBox="1"/>
+          <p:nvPr/>
+        </p:nvSpPr>
+        <p:spPr>
+          <a:xfrm>
+            <a:off x="10710367" y="6355080"/>
+            <a:ext cx="914400" cy="219456"/>
+          </a:xfrm>
+          <a:prstGeom prst="rect">
+            <a:avLst/>
+          </a:prstGeom>
+          <a:noFill/>
+        </p:spPr>
+        <p:txBody>
+          <a:bodyPr wrap="square" lIns="0" rIns="0" tIns="0" bIns="0" anchor="t">
+            <a:spAutoFit/>
+          </a:bodyPr>
+          <a:lstStyle/>
+          <a:p>
+            <a:pPr algn="r">
+              <a:lnSpc>
+                <a:spcPct val="135000"/>
+              </a:lnSpc>
+            </a:pPr>
+            <a:r>
+              <a:rPr sz="1200" b="0" i="0">
+                <a:solidFill>
+                  <a:srgbClr val="6E7175"/>
+                </a:solidFill>
+                <a:latin typeface="Verdana"/>
+              </a:rPr>
+              <a:t>15</a:t>
+            </a:r>
+          </a:p>
+        </p:txBody>
+      </p:sp>
+      <p:sp>
+        <p:nvSpPr>
           <p:cNvPr id="5" name="Rectangle 4"/>
           <p:cNvSpPr/>
           <p:nvPr/>
@@ -13423,7 +14421,7 @@
                 </a:solidFill>
                 <a:latin typeface="Verdana"/>
               </a:rPr>
-              <a:t>LE PIÈGE DU « DE » QUI SAUTE</a:t>
+              <a:t>DANS L'ACTIVITÉ INTERACTIVE</a:t>
             </a:r>
           </a:p>
         </p:txBody>
@@ -13462,33 +14460,72 @@
                 </a:solidFill>
                 <a:latin typeface="Verdana"/>
               </a:rPr>
-              <a:t>Le piège le plus fréquent</a:t>
-            </a:r>
-          </a:p>
-        </p:txBody>
-      </p:sp>
-      <p:sp>
-        <p:nvSpPr>
-          <p:cNvPr id="7" name="Rounded Rectangle 6"/>
+              <a:t>Avoir besoin de</a:t>
+            </a:r>
+          </a:p>
+        </p:txBody>
+      </p:sp>
+      <p:sp>
+        <p:nvSpPr>
+          <p:cNvPr id="7" name="TextBox 6"/>
+          <p:cNvSpPr txBox="1"/>
+          <p:nvPr/>
+        </p:nvSpPr>
+        <p:spPr>
+          <a:xfrm>
+            <a:off x="566928" y="1645920"/>
+            <a:ext cx="11057839" cy="329184"/>
+          </a:xfrm>
+          <a:prstGeom prst="rect">
+            <a:avLst/>
+          </a:prstGeom>
+          <a:noFill/>
+        </p:spPr>
+        <p:txBody>
+          <a:bodyPr wrap="square" lIns="0" rIns="0" tIns="0" bIns="0" anchor="t">
+            <a:spAutoFit/>
+          </a:bodyPr>
+          <a:lstStyle/>
+          <a:p>
+            <a:pPr algn="l">
+              <a:lnSpc>
+                <a:spcPct val="135000"/>
+              </a:lnSpc>
+            </a:pPr>
+            <a:r>
+              <a:rPr sz="1800" b="0" i="0">
+                <a:solidFill>
+                  <a:srgbClr val="6E7175"/>
+                </a:solidFill>
+                <a:latin typeface="Verdana"/>
+              </a:rPr>
+              <a:t>L'écran que les élèves vont ouvrir. Les réponses sont encore dans le banc, à droite.</a:t>
+            </a:r>
+          </a:p>
+        </p:txBody>
+      </p:sp>
+      <p:sp>
+        <p:nvSpPr>
+          <p:cNvPr id="8" name="Rounded Rectangle 7"/>
           <p:cNvSpPr/>
           <p:nvPr/>
         </p:nvSpPr>
         <p:spPr>
           <a:xfrm>
-            <a:off x="566928" y="1856232"/>
-            <a:ext cx="5428335" cy="2331720"/>
+            <a:off x="3115939" y="2084831"/>
+            <a:ext cx="5959816" cy="4087368"/>
           </a:xfrm>
           <a:prstGeom prst="roundRect">
             <a:avLst>
-              <a:gd name="adj" fmla="val 6274"/>
+              <a:gd name="adj" fmla="val 2237"/>
             </a:avLst>
           </a:prstGeom>
           <a:solidFill>
-            <a:srgbClr val="FFF6F5"/>
+            <a:srgbClr val="FFFFFF"/>
           </a:solidFill>
           <a:ln w="12700">
             <a:solidFill>
-              <a:srgbClr val="DC2626"/>
+              <a:srgbClr val="D6D6D2"/>
             </a:solidFill>
           </a:ln>
           <a:effectLst/>
@@ -13513,293 +14550,30 @@
           <a:p/>
         </p:txBody>
       </p:sp>
-      <p:sp>
-        <p:nvSpPr>
-          <p:cNvPr id="8" name="TextBox 7"/>
-          <p:cNvSpPr txBox="1"/>
-          <p:nvPr/>
-        </p:nvSpPr>
-        <p:spPr>
-          <a:xfrm>
-            <a:off x="932688" y="2130552"/>
-            <a:ext cx="4696815" cy="274320"/>
-          </a:xfrm>
-          <a:prstGeom prst="rect">
-            <a:avLst/>
-          </a:prstGeom>
-          <a:noFill/>
-        </p:spPr>
-        <p:txBody>
-          <a:bodyPr wrap="square" lIns="0" rIns="0" tIns="0" bIns="0" anchor="t">
-            <a:spAutoFit/>
-          </a:bodyPr>
-          <a:lstStyle/>
-          <a:p>
-            <a:pPr algn="l">
-              <a:lnSpc>
-                <a:spcPct val="135000"/>
-              </a:lnSpc>
-            </a:pPr>
-            <a:r>
-              <a:rPr sz="1300" b="1" i="0" spc="156">
-                <a:solidFill>
-                  <a:srgbClr val="B91C1C"/>
-                </a:solidFill>
-                <a:latin typeface="Verdana"/>
-              </a:rPr>
-              <a:t>ON ENTEND SOUVENT</a:t>
-            </a:r>
-          </a:p>
-        </p:txBody>
-      </p:sp>
-      <p:sp>
-        <p:nvSpPr>
-          <p:cNvPr id="9" name="TextBox 8"/>
-          <p:cNvSpPr txBox="1"/>
-          <p:nvPr/>
-        </p:nvSpPr>
-        <p:spPr>
-          <a:xfrm>
-            <a:off x="932688" y="2569464"/>
-            <a:ext cx="4696815" cy="1417320"/>
-          </a:xfrm>
-          <a:prstGeom prst="rect">
-            <a:avLst/>
-          </a:prstGeom>
-          <a:noFill/>
-        </p:spPr>
-        <p:txBody>
-          <a:bodyPr wrap="square" lIns="0" rIns="0" tIns="0" bIns="0" anchor="t">
-            <a:spAutoFit/>
-          </a:bodyPr>
-          <a:lstStyle/>
-          <a:p>
-            <a:pPr algn="l">
-              <a:lnSpc>
-                <a:spcPct val="130000"/>
-              </a:lnSpc>
-            </a:pPr>
-            <a:r>
-              <a:rPr sz="2500" b="1" i="0">
-                <a:solidFill>
-                  <a:srgbClr val="17181A"/>
-                </a:solidFill>
-                <a:latin typeface="Verdana"/>
-              </a:rPr>
-              <a:t>J'ai besoin un rendez-vous.</a:t>
-            </a:r>
-          </a:p>
-        </p:txBody>
-      </p:sp>
-      <p:sp>
-        <p:nvSpPr>
-          <p:cNvPr id="10" name="Rounded Rectangle 9"/>
-          <p:cNvSpPr/>
-          <p:nvPr/>
-        </p:nvSpPr>
-        <p:spPr>
-          <a:xfrm>
-            <a:off x="6196431" y="1856232"/>
-            <a:ext cx="5428335" cy="2331720"/>
-          </a:xfrm>
-          <a:prstGeom prst="roundRect">
-            <a:avLst>
-              <a:gd name="adj" fmla="val 6274"/>
-            </a:avLst>
-          </a:prstGeom>
-          <a:solidFill>
-            <a:srgbClr val="E6F5EE"/>
-          </a:solidFill>
-          <a:ln w="12700">
-            <a:solidFill>
-              <a:srgbClr val="0A8F5B"/>
-            </a:solidFill>
-          </a:ln>
-          <a:effectLst/>
-        </p:spPr>
-        <p:style>
-          <a:lnRef idx="1">
-            <a:schemeClr val="accent1"/>
-          </a:lnRef>
-          <a:fillRef idx="3">
-            <a:schemeClr val="accent1"/>
-          </a:fillRef>
-          <a:effectRef idx="2">
-            <a:schemeClr val="accent1"/>
-          </a:effectRef>
-          <a:fontRef idx="minor">
-            <a:schemeClr val="lt1"/>
-          </a:fontRef>
-        </p:style>
-        <p:txBody>
-          <a:bodyPr rtlCol="0" anchor="ctr"/>
-          <a:lstStyle/>
-          <a:p/>
-        </p:txBody>
-      </p:sp>
-      <p:sp>
-        <p:nvSpPr>
-          <p:cNvPr id="11" name="TextBox 10"/>
-          <p:cNvSpPr txBox="1"/>
-          <p:nvPr/>
-        </p:nvSpPr>
-        <p:spPr>
-          <a:xfrm>
-            <a:off x="6562191" y="2130552"/>
-            <a:ext cx="4696815" cy="274320"/>
-          </a:xfrm>
-          <a:prstGeom prst="rect">
-            <a:avLst/>
-          </a:prstGeom>
-          <a:noFill/>
-        </p:spPr>
-        <p:txBody>
-          <a:bodyPr wrap="square" lIns="0" rIns="0" tIns="0" bIns="0" anchor="t">
-            <a:spAutoFit/>
-          </a:bodyPr>
-          <a:lstStyle/>
-          <a:p>
-            <a:pPr algn="l">
-              <a:lnSpc>
-                <a:spcPct val="135000"/>
-              </a:lnSpc>
-            </a:pPr>
-            <a:r>
-              <a:rPr sz="1300" b="1" i="0" spc="156">
-                <a:solidFill>
-                  <a:srgbClr val="07734A"/>
-                </a:solidFill>
-                <a:latin typeface="Verdana"/>
-              </a:rPr>
-              <a:t>IL FAUT DIRE PLUTÔT</a:t>
-            </a:r>
-          </a:p>
-        </p:txBody>
-      </p:sp>
-      <p:sp>
-        <p:nvSpPr>
-          <p:cNvPr id="12" name="TextBox 11"/>
-          <p:cNvSpPr txBox="1"/>
-          <p:nvPr/>
-        </p:nvSpPr>
-        <p:spPr>
-          <a:xfrm>
-            <a:off x="6562191" y="2569464"/>
-            <a:ext cx="4696815" cy="1417320"/>
-          </a:xfrm>
-          <a:prstGeom prst="rect">
-            <a:avLst/>
-          </a:prstGeom>
-          <a:noFill/>
-        </p:spPr>
-        <p:txBody>
-          <a:bodyPr wrap="square" lIns="0" rIns="0" tIns="0" bIns="0" anchor="t">
-            <a:spAutoFit/>
-          </a:bodyPr>
-          <a:lstStyle/>
-          <a:p>
-            <a:pPr algn="l">
-              <a:lnSpc>
-                <a:spcPct val="130000"/>
-              </a:lnSpc>
-            </a:pPr>
-            <a:r>
-              <a:rPr sz="2500" b="1" i="0">
-                <a:solidFill>
-                  <a:srgbClr val="17181A"/>
-                </a:solidFill>
-                <a:latin typeface="Verdana"/>
-              </a:rPr>
-              <a:t>J'ai besoin d'un rendez-vous.</a:t>
-            </a:r>
-          </a:p>
-        </p:txBody>
-      </p:sp>
-      <p:sp>
-        <p:nvSpPr>
-          <p:cNvPr id="13" name="Rounded Rectangle 12"/>
-          <p:cNvSpPr/>
-          <p:nvPr/>
-        </p:nvSpPr>
-        <p:spPr>
-          <a:xfrm>
-            <a:off x="566928" y="4462272"/>
-            <a:ext cx="11057839" cy="1285240"/>
-          </a:xfrm>
-          <a:prstGeom prst="roundRect">
-            <a:avLst>
-              <a:gd name="adj" fmla="val 11383"/>
-            </a:avLst>
-          </a:prstGeom>
-          <a:solidFill>
-            <a:srgbClr val="FFFFFF"/>
-          </a:solidFill>
-          <a:ln w="12700">
-            <a:solidFill>
-              <a:srgbClr val="EAEAE8"/>
-            </a:solidFill>
-          </a:ln>
-          <a:effectLst/>
-        </p:spPr>
-        <p:style>
-          <a:lnRef idx="1">
-            <a:schemeClr val="accent1"/>
-          </a:lnRef>
-          <a:fillRef idx="3">
-            <a:schemeClr val="accent1"/>
-          </a:fillRef>
-          <a:effectRef idx="2">
-            <a:schemeClr val="accent1"/>
-          </a:effectRef>
-          <a:fontRef idx="minor">
-            <a:schemeClr val="lt1"/>
-          </a:fontRef>
-        </p:style>
-        <p:txBody>
-          <a:bodyPr rtlCol="0" anchor="ctr"/>
-          <a:lstStyle/>
-          <a:p/>
-        </p:txBody>
-      </p:sp>
-      <p:sp>
-        <p:nvSpPr>
-          <p:cNvPr id="14" name="TextBox 13"/>
-          <p:cNvSpPr txBox="1"/>
-          <p:nvPr/>
-        </p:nvSpPr>
-        <p:spPr>
-          <a:xfrm>
-            <a:off x="969264" y="4736592"/>
-            <a:ext cx="10234879" cy="782320"/>
-          </a:xfrm>
-          <a:prstGeom prst="rect">
-            <a:avLst/>
-          </a:prstGeom>
-          <a:noFill/>
-        </p:spPr>
-        <p:txBody>
-          <a:bodyPr wrap="square" lIns="0" rIns="0" tIns="0" bIns="0" anchor="t">
-            <a:spAutoFit/>
-          </a:bodyPr>
-          <a:lstStyle/>
-          <a:p>
-            <a:pPr algn="l">
-              <a:lnSpc>
-                <a:spcPct val="145000"/>
-              </a:lnSpc>
-            </a:pPr>
-            <a:r>
-              <a:rPr sz="2000" b="0" i="0">
-                <a:solidFill>
-                  <a:srgbClr val="4B4F52"/>
-                </a:solidFill>
-                <a:latin typeface="Verdana"/>
-              </a:rPr>
-              <a:t>C'est le « de » qui relie « besoin » à la suite. Sans lui, la phrase s'arrête net et l'interlocuteur attend la fin.</a:t>
-            </a:r>
-          </a:p>
-        </p:txBody>
-      </p:sp>
+      <p:pic>
+        <p:nvPicPr>
+          <p:cNvPr id="9" name="Picture 8" descr="l3.png"/>
+          <p:cNvPicPr>
+            <a:picLocks noChangeAspect="1"/>
+          </p:cNvPicPr>
+          <p:nvPr/>
+        </p:nvPicPr>
+        <p:blipFill>
+          <a:blip r:embed="rId2"/>
+          <a:stretch>
+            <a:fillRect/>
+          </a:stretch>
+        </p:blipFill>
+        <p:spPr>
+          <a:xfrm>
+            <a:off x="3134227" y="2103120"/>
+            <a:ext cx="5923240" cy="4050792"/>
+          </a:xfrm>
+          <a:prstGeom prst="rect">
+            <a:avLst/>
+          </a:prstGeom>
+        </p:spPr>
+      </p:pic>
     </p:spTree>
   </p:cSld>
   <p:clrMapOvr>
@@ -13972,7 +14746,7 @@
                 </a:solidFill>
                 <a:latin typeface="Verdana"/>
               </a:rPr>
-              <a:t>LE PIÈGE DU VERBE MANQUANT</a:t>
+              <a:t>LE PIÈGE DU « DE » QUI SAUTE</a:t>
             </a:r>
           </a:p>
         </p:txBody>
@@ -14135,7 +14909,7 @@
                 </a:solidFill>
                 <a:latin typeface="Verdana"/>
               </a:rPr>
-              <a:t>Je besoin d'un médicament.</a:t>
+              <a:t>J'ai besoin un rendez-vous.</a:t>
             </a:r>
           </a:p>
         </p:txBody>
@@ -14259,7 +15033,7 @@
                 </a:solidFill>
                 <a:latin typeface="Verdana"/>
               </a:rPr>
-              <a:t>J'ai besoin d'un médicament.</a:t>
+              <a:t>J'ai besoin d'un rendez-vous.</a:t>
             </a:r>
           </a:p>
         </p:txBody>
@@ -14344,7 +15118,7 @@
                 </a:solidFill>
                 <a:latin typeface="Verdana"/>
               </a:rPr>
-              <a:t>« Besoin » est un nom, pas un verbe. Il lui faut « avoir » devant : j'ai, tu as, il a, nous avons, vous avez, ils ont.</a:t>
+              <a:t>C'est le « de » qui relie « besoin » à la suite. Sans lui, la phrase s'arrête net et l'interlocuteur attend la fin.</a:t>
             </a:r>
           </a:p>
         </p:txBody>
@@ -14521,7 +15295,7 @@
                 </a:solidFill>
                 <a:latin typeface="Verdana"/>
               </a:rPr>
-              <a:t>PRATIQUE · 2 DE 4</a:t>
+              <a:t>LE PIÈGE DU VERBE MANQUANT</a:t>
             </a:r>
           </a:p>
         </p:txBody>
@@ -14560,21 +15334,67 @@
                 </a:solidFill>
                 <a:latin typeface="Verdana"/>
               </a:rPr>
-              <a:t>Transformez la demande</a:t>
-            </a:r>
-          </a:p>
-        </p:txBody>
-      </p:sp>
-      <p:sp>
-        <p:nvSpPr>
-          <p:cNvPr id="7" name="TextBox 6"/>
+              <a:t>Le piège le plus fréquent</a:t>
+            </a:r>
+          </a:p>
+        </p:txBody>
+      </p:sp>
+      <p:sp>
+        <p:nvSpPr>
+          <p:cNvPr id="7" name="Rounded Rectangle 6"/>
+          <p:cNvSpPr/>
+          <p:nvPr/>
+        </p:nvSpPr>
+        <p:spPr>
+          <a:xfrm>
+            <a:off x="566928" y="1856232"/>
+            <a:ext cx="5428335" cy="2331720"/>
+          </a:xfrm>
+          <a:prstGeom prst="roundRect">
+            <a:avLst>
+              <a:gd name="adj" fmla="val 6274"/>
+            </a:avLst>
+          </a:prstGeom>
+          <a:solidFill>
+            <a:srgbClr val="FFF6F5"/>
+          </a:solidFill>
+          <a:ln w="12700">
+            <a:solidFill>
+              <a:srgbClr val="DC2626"/>
+            </a:solidFill>
+          </a:ln>
+          <a:effectLst/>
+        </p:spPr>
+        <p:style>
+          <a:lnRef idx="1">
+            <a:schemeClr val="accent1"/>
+          </a:lnRef>
+          <a:fillRef idx="3">
+            <a:schemeClr val="accent1"/>
+          </a:fillRef>
+          <a:effectRef idx="2">
+            <a:schemeClr val="accent1"/>
+          </a:effectRef>
+          <a:fontRef idx="minor">
+            <a:schemeClr val="lt1"/>
+          </a:fontRef>
+        </p:style>
+        <p:txBody>
+          <a:bodyPr rtlCol="0" anchor="ctr"/>
+          <a:lstStyle/>
+          <a:p/>
+        </p:txBody>
+      </p:sp>
+      <p:sp>
+        <p:nvSpPr>
+          <p:cNvPr id="8" name="TextBox 7"/>
           <p:cNvSpPr txBox="1"/>
           <p:nvPr/>
         </p:nvSpPr>
         <p:spPr>
           <a:xfrm>
-            <a:off x="566928" y="1645920"/>
-            <a:ext cx="11057839" cy="329184"/>
+            <a:off x="932688" y="2130552"/>
+            <a:ext cx="4696815" cy="274320"/>
           </a:xfrm>
           <a:prstGeom prst="rect">
             <a:avLst/>
@@ -14593,31 +15413,194 @@
               </a:lnSpc>
             </a:pPr>
             <a:r>
-              <a:rPr sz="1800" b="0" i="0">
-                <a:solidFill>
-                  <a:srgbClr val="6E7175"/>
-                </a:solidFill>
-                <a:latin typeface="Verdana"/>
-              </a:rPr>
-              <a:t>Dites-le avec « avoir besoin de ».</a:t>
-            </a:r>
-          </a:p>
-        </p:txBody>
-      </p:sp>
-      <p:sp>
-        <p:nvSpPr>
-          <p:cNvPr id="8" name="Rounded Rectangle 7"/>
+              <a:rPr sz="1300" b="1" i="0" spc="156">
+                <a:solidFill>
+                  <a:srgbClr val="B91C1C"/>
+                </a:solidFill>
+                <a:latin typeface="Verdana"/>
+              </a:rPr>
+              <a:t>ON ENTEND SOUVENT</a:t>
+            </a:r>
+          </a:p>
+        </p:txBody>
+      </p:sp>
+      <p:sp>
+        <p:nvSpPr>
+          <p:cNvPr id="9" name="TextBox 8"/>
+          <p:cNvSpPr txBox="1"/>
+          <p:nvPr/>
+        </p:nvSpPr>
+        <p:spPr>
+          <a:xfrm>
+            <a:off x="932688" y="2569464"/>
+            <a:ext cx="4696815" cy="1417320"/>
+          </a:xfrm>
+          <a:prstGeom prst="rect">
+            <a:avLst/>
+          </a:prstGeom>
+          <a:noFill/>
+        </p:spPr>
+        <p:txBody>
+          <a:bodyPr wrap="square" lIns="0" rIns="0" tIns="0" bIns="0" anchor="t">
+            <a:spAutoFit/>
+          </a:bodyPr>
+          <a:lstStyle/>
+          <a:p>
+            <a:pPr algn="l">
+              <a:lnSpc>
+                <a:spcPct val="130000"/>
+              </a:lnSpc>
+            </a:pPr>
+            <a:r>
+              <a:rPr sz="2500" b="1" i="0">
+                <a:solidFill>
+                  <a:srgbClr val="17181A"/>
+                </a:solidFill>
+                <a:latin typeface="Verdana"/>
+              </a:rPr>
+              <a:t>Je besoin d'un médicament.</a:t>
+            </a:r>
+          </a:p>
+        </p:txBody>
+      </p:sp>
+      <p:sp>
+        <p:nvSpPr>
+          <p:cNvPr id="10" name="Rounded Rectangle 9"/>
           <p:cNvSpPr/>
           <p:nvPr/>
         </p:nvSpPr>
         <p:spPr>
           <a:xfrm>
-            <a:off x="566928" y="2139696"/>
-            <a:ext cx="11057839" cy="648716"/>
+            <a:off x="6196431" y="1856232"/>
+            <a:ext cx="5428335" cy="2331720"/>
           </a:xfrm>
           <a:prstGeom prst="roundRect">
             <a:avLst>
-              <a:gd name="adj" fmla="val 22552"/>
+              <a:gd name="adj" fmla="val 6274"/>
+            </a:avLst>
+          </a:prstGeom>
+          <a:solidFill>
+            <a:srgbClr val="E6F5EE"/>
+          </a:solidFill>
+          <a:ln w="12700">
+            <a:solidFill>
+              <a:srgbClr val="0A8F5B"/>
+            </a:solidFill>
+          </a:ln>
+          <a:effectLst/>
+        </p:spPr>
+        <p:style>
+          <a:lnRef idx="1">
+            <a:schemeClr val="accent1"/>
+          </a:lnRef>
+          <a:fillRef idx="3">
+            <a:schemeClr val="accent1"/>
+          </a:fillRef>
+          <a:effectRef idx="2">
+            <a:schemeClr val="accent1"/>
+          </a:effectRef>
+          <a:fontRef idx="minor">
+            <a:schemeClr val="lt1"/>
+          </a:fontRef>
+        </p:style>
+        <p:txBody>
+          <a:bodyPr rtlCol="0" anchor="ctr"/>
+          <a:lstStyle/>
+          <a:p/>
+        </p:txBody>
+      </p:sp>
+      <p:sp>
+        <p:nvSpPr>
+          <p:cNvPr id="11" name="TextBox 10"/>
+          <p:cNvSpPr txBox="1"/>
+          <p:nvPr/>
+        </p:nvSpPr>
+        <p:spPr>
+          <a:xfrm>
+            <a:off x="6562191" y="2130552"/>
+            <a:ext cx="4696815" cy="274320"/>
+          </a:xfrm>
+          <a:prstGeom prst="rect">
+            <a:avLst/>
+          </a:prstGeom>
+          <a:noFill/>
+        </p:spPr>
+        <p:txBody>
+          <a:bodyPr wrap="square" lIns="0" rIns="0" tIns="0" bIns="0" anchor="t">
+            <a:spAutoFit/>
+          </a:bodyPr>
+          <a:lstStyle/>
+          <a:p>
+            <a:pPr algn="l">
+              <a:lnSpc>
+                <a:spcPct val="135000"/>
+              </a:lnSpc>
+            </a:pPr>
+            <a:r>
+              <a:rPr sz="1300" b="1" i="0" spc="156">
+                <a:solidFill>
+                  <a:srgbClr val="07734A"/>
+                </a:solidFill>
+                <a:latin typeface="Verdana"/>
+              </a:rPr>
+              <a:t>IL FAUT DIRE PLUTÔT</a:t>
+            </a:r>
+          </a:p>
+        </p:txBody>
+      </p:sp>
+      <p:sp>
+        <p:nvSpPr>
+          <p:cNvPr id="12" name="TextBox 11"/>
+          <p:cNvSpPr txBox="1"/>
+          <p:nvPr/>
+        </p:nvSpPr>
+        <p:spPr>
+          <a:xfrm>
+            <a:off x="6562191" y="2569464"/>
+            <a:ext cx="4696815" cy="1417320"/>
+          </a:xfrm>
+          <a:prstGeom prst="rect">
+            <a:avLst/>
+          </a:prstGeom>
+          <a:noFill/>
+        </p:spPr>
+        <p:txBody>
+          <a:bodyPr wrap="square" lIns="0" rIns="0" tIns="0" bIns="0" anchor="t">
+            <a:spAutoFit/>
+          </a:bodyPr>
+          <a:lstStyle/>
+          <a:p>
+            <a:pPr algn="l">
+              <a:lnSpc>
+                <a:spcPct val="130000"/>
+              </a:lnSpc>
+            </a:pPr>
+            <a:r>
+              <a:rPr sz="2500" b="1" i="0">
+                <a:solidFill>
+                  <a:srgbClr val="17181A"/>
+                </a:solidFill>
+                <a:latin typeface="Verdana"/>
+              </a:rPr>
+              <a:t>J'ai besoin d'un médicament.</a:t>
+            </a:r>
+          </a:p>
+        </p:txBody>
+      </p:sp>
+      <p:sp>
+        <p:nvSpPr>
+          <p:cNvPr id="13" name="Rounded Rectangle 12"/>
+          <p:cNvSpPr/>
+          <p:nvPr/>
+        </p:nvSpPr>
+        <p:spPr>
+          <a:xfrm>
+            <a:off x="566928" y="4462272"/>
+            <a:ext cx="11057839" cy="1285240"/>
+          </a:xfrm>
+          <a:prstGeom prst="roundRect">
+            <a:avLst>
+              <a:gd name="adj" fmla="val 11383"/>
             </a:avLst>
           </a:prstGeom>
           <a:solidFill>
@@ -14652,58 +15635,14 @@
       </p:sp>
       <p:sp>
         <p:nvSpPr>
-          <p:cNvPr id="9" name="Rounded Rectangle 8"/>
-          <p:cNvSpPr/>
-          <p:nvPr/>
-        </p:nvSpPr>
-        <p:spPr>
-          <a:xfrm>
-            <a:off x="841247" y="2281174"/>
-            <a:ext cx="365760" cy="365760"/>
-          </a:xfrm>
-          <a:prstGeom prst="roundRect">
-            <a:avLst>
-              <a:gd name="adj" fmla="val 32500"/>
-            </a:avLst>
-          </a:prstGeom>
-          <a:solidFill>
-            <a:srgbClr val="DCF2EF"/>
-          </a:solidFill>
-          <a:ln>
-            <a:noFill/>
-          </a:ln>
-          <a:effectLst/>
-        </p:spPr>
-        <p:style>
-          <a:lnRef idx="1">
-            <a:schemeClr val="accent1"/>
-          </a:lnRef>
-          <a:fillRef idx="3">
-            <a:schemeClr val="accent1"/>
-          </a:fillRef>
-          <a:effectRef idx="2">
-            <a:schemeClr val="accent1"/>
-          </a:effectRef>
-          <a:fontRef idx="minor">
-            <a:schemeClr val="lt1"/>
-          </a:fontRef>
-        </p:style>
-        <p:txBody>
-          <a:bodyPr rtlCol="0" anchor="ctr"/>
-          <a:lstStyle/>
-          <a:p/>
-        </p:txBody>
-      </p:sp>
-      <p:sp>
-        <p:nvSpPr>
-          <p:cNvPr id="10" name="TextBox 9"/>
+          <p:cNvPr id="14" name="TextBox 13"/>
           <p:cNvSpPr txBox="1"/>
           <p:nvPr/>
         </p:nvSpPr>
         <p:spPr>
           <a:xfrm>
-            <a:off x="841247" y="2345182"/>
-            <a:ext cx="365760" cy="256032"/>
+            <a:off x="969264" y="4736592"/>
+            <a:ext cx="10234879" cy="782320"/>
           </a:xfrm>
           <a:prstGeom prst="rect">
             <a:avLst/>
@@ -14716,562 +15655,19 @@
           </a:bodyPr>
           <a:lstStyle/>
           <a:p>
-            <a:pPr algn="ctr">
+            <a:pPr algn="l">
               <a:lnSpc>
-                <a:spcPct val="135000"/>
+                <a:spcPct val="145000"/>
               </a:lnSpc>
             </a:pPr>
             <a:r>
-              <a:rPr sz="1500" b="1" i="0">
-                <a:solidFill>
-                  <a:srgbClr val="0D7A6F"/>
-                </a:solidFill>
-                <a:latin typeface="Verdana"/>
-              </a:rPr>
-              <a:t>1</a:t>
-            </a:r>
-          </a:p>
-        </p:txBody>
-      </p:sp>
-      <p:sp>
-        <p:nvSpPr>
-          <p:cNvPr id="11" name="TextBox 10"/>
-          <p:cNvSpPr txBox="1"/>
-          <p:nvPr/>
-        </p:nvSpPr>
-        <p:spPr>
-          <a:xfrm>
-            <a:off x="1344168" y="2295144"/>
-            <a:ext cx="10097719" cy="374396"/>
-          </a:xfrm>
-          <a:prstGeom prst="rect">
-            <a:avLst/>
-          </a:prstGeom>
-          <a:noFill/>
-        </p:spPr>
-        <p:txBody>
-          <a:bodyPr wrap="square" lIns="0" rIns="0" tIns="0" bIns="0" anchor="t">
-            <a:spAutoFit/>
-          </a:bodyPr>
-          <a:lstStyle/>
-          <a:p>
-            <a:pPr algn="l">
-              <a:lnSpc>
-                <a:spcPct val="140000"/>
-              </a:lnSpc>
-            </a:pPr>
-            <a:r>
-              <a:rPr sz="1900" b="0" i="0">
-                <a:solidFill>
-                  <a:srgbClr val="3A3D40"/>
-                </a:solidFill>
-                <a:latin typeface="Verdana"/>
-              </a:rPr>
-              <a:t>Je voudrais un rendez-vous.</a:t>
-            </a:r>
-          </a:p>
-        </p:txBody>
-      </p:sp>
-      <p:sp>
-        <p:nvSpPr>
-          <p:cNvPr id="12" name="Rounded Rectangle 11"/>
-          <p:cNvSpPr/>
-          <p:nvPr/>
-        </p:nvSpPr>
-        <p:spPr>
-          <a:xfrm>
-            <a:off x="566928" y="2916428"/>
-            <a:ext cx="11057839" cy="648716"/>
-          </a:xfrm>
-          <a:prstGeom prst="roundRect">
-            <a:avLst>
-              <a:gd name="adj" fmla="val 22552"/>
-            </a:avLst>
-          </a:prstGeom>
-          <a:solidFill>
-            <a:srgbClr val="FFFFFF"/>
-          </a:solidFill>
-          <a:ln w="12700">
-            <a:solidFill>
-              <a:srgbClr val="EAEAE8"/>
-            </a:solidFill>
-          </a:ln>
-          <a:effectLst/>
-        </p:spPr>
-        <p:style>
-          <a:lnRef idx="1">
-            <a:schemeClr val="accent1"/>
-          </a:lnRef>
-          <a:fillRef idx="3">
-            <a:schemeClr val="accent1"/>
-          </a:fillRef>
-          <a:effectRef idx="2">
-            <a:schemeClr val="accent1"/>
-          </a:effectRef>
-          <a:fontRef idx="minor">
-            <a:schemeClr val="lt1"/>
-          </a:fontRef>
-        </p:style>
-        <p:txBody>
-          <a:bodyPr rtlCol="0" anchor="ctr"/>
-          <a:lstStyle/>
-          <a:p/>
-        </p:txBody>
-      </p:sp>
-      <p:sp>
-        <p:nvSpPr>
-          <p:cNvPr id="13" name="Rounded Rectangle 12"/>
-          <p:cNvSpPr/>
-          <p:nvPr/>
-        </p:nvSpPr>
-        <p:spPr>
-          <a:xfrm>
-            <a:off x="841247" y="3057905"/>
-            <a:ext cx="365760" cy="365760"/>
-          </a:xfrm>
-          <a:prstGeom prst="roundRect">
-            <a:avLst>
-              <a:gd name="adj" fmla="val 32500"/>
-            </a:avLst>
-          </a:prstGeom>
-          <a:solidFill>
-            <a:srgbClr val="DCF2EF"/>
-          </a:solidFill>
-          <a:ln>
-            <a:noFill/>
-          </a:ln>
-          <a:effectLst/>
-        </p:spPr>
-        <p:style>
-          <a:lnRef idx="1">
-            <a:schemeClr val="accent1"/>
-          </a:lnRef>
-          <a:fillRef idx="3">
-            <a:schemeClr val="accent1"/>
-          </a:fillRef>
-          <a:effectRef idx="2">
-            <a:schemeClr val="accent1"/>
-          </a:effectRef>
-          <a:fontRef idx="minor">
-            <a:schemeClr val="lt1"/>
-          </a:fontRef>
-        </p:style>
-        <p:txBody>
-          <a:bodyPr rtlCol="0" anchor="ctr"/>
-          <a:lstStyle/>
-          <a:p/>
-        </p:txBody>
-      </p:sp>
-      <p:sp>
-        <p:nvSpPr>
-          <p:cNvPr id="14" name="TextBox 13"/>
-          <p:cNvSpPr txBox="1"/>
-          <p:nvPr/>
-        </p:nvSpPr>
-        <p:spPr>
-          <a:xfrm>
-            <a:off x="841247" y="3121913"/>
-            <a:ext cx="365760" cy="256032"/>
-          </a:xfrm>
-          <a:prstGeom prst="rect">
-            <a:avLst/>
-          </a:prstGeom>
-          <a:noFill/>
-        </p:spPr>
-        <p:txBody>
-          <a:bodyPr wrap="square" lIns="0" rIns="0" tIns="0" bIns="0" anchor="t">
-            <a:spAutoFit/>
-          </a:bodyPr>
-          <a:lstStyle/>
-          <a:p>
-            <a:pPr algn="ctr">
-              <a:lnSpc>
-                <a:spcPct val="135000"/>
-              </a:lnSpc>
-            </a:pPr>
-            <a:r>
-              <a:rPr sz="1500" b="1" i="0">
-                <a:solidFill>
-                  <a:srgbClr val="0D7A6F"/>
-                </a:solidFill>
-                <a:latin typeface="Verdana"/>
-              </a:rPr>
-              <a:t>2</a:t>
-            </a:r>
-          </a:p>
-        </p:txBody>
-      </p:sp>
-      <p:sp>
-        <p:nvSpPr>
-          <p:cNvPr id="15" name="TextBox 14"/>
-          <p:cNvSpPr txBox="1"/>
-          <p:nvPr/>
-        </p:nvSpPr>
-        <p:spPr>
-          <a:xfrm>
-            <a:off x="1344168" y="3071876"/>
-            <a:ext cx="10097719" cy="374396"/>
-          </a:xfrm>
-          <a:prstGeom prst="rect">
-            <a:avLst/>
-          </a:prstGeom>
-          <a:noFill/>
-        </p:spPr>
-        <p:txBody>
-          <a:bodyPr wrap="square" lIns="0" rIns="0" tIns="0" bIns="0" anchor="t">
-            <a:spAutoFit/>
-          </a:bodyPr>
-          <a:lstStyle/>
-          <a:p>
-            <a:pPr algn="l">
-              <a:lnSpc>
-                <a:spcPct val="140000"/>
-              </a:lnSpc>
-            </a:pPr>
-            <a:r>
-              <a:rPr sz="1900" b="0" i="0">
-                <a:solidFill>
-                  <a:srgbClr val="3A3D40"/>
-                </a:solidFill>
-                <a:latin typeface="Verdana"/>
-              </a:rPr>
-              <a:t>Je dois me reposer.</a:t>
-            </a:r>
-          </a:p>
-        </p:txBody>
-      </p:sp>
-      <p:sp>
-        <p:nvSpPr>
-          <p:cNvPr id="16" name="Rounded Rectangle 15"/>
-          <p:cNvSpPr/>
-          <p:nvPr/>
-        </p:nvSpPr>
-        <p:spPr>
-          <a:xfrm>
-            <a:off x="566928" y="3693160"/>
-            <a:ext cx="11057839" cy="648716"/>
-          </a:xfrm>
-          <a:prstGeom prst="roundRect">
-            <a:avLst>
-              <a:gd name="adj" fmla="val 22552"/>
-            </a:avLst>
-          </a:prstGeom>
-          <a:solidFill>
-            <a:srgbClr val="FFFFFF"/>
-          </a:solidFill>
-          <a:ln w="12700">
-            <a:solidFill>
-              <a:srgbClr val="EAEAE8"/>
-            </a:solidFill>
-          </a:ln>
-          <a:effectLst/>
-        </p:spPr>
-        <p:style>
-          <a:lnRef idx="1">
-            <a:schemeClr val="accent1"/>
-          </a:lnRef>
-          <a:fillRef idx="3">
-            <a:schemeClr val="accent1"/>
-          </a:fillRef>
-          <a:effectRef idx="2">
-            <a:schemeClr val="accent1"/>
-          </a:effectRef>
-          <a:fontRef idx="minor">
-            <a:schemeClr val="lt1"/>
-          </a:fontRef>
-        </p:style>
-        <p:txBody>
-          <a:bodyPr rtlCol="0" anchor="ctr"/>
-          <a:lstStyle/>
-          <a:p/>
-        </p:txBody>
-      </p:sp>
-      <p:sp>
-        <p:nvSpPr>
-          <p:cNvPr id="17" name="Rounded Rectangle 16"/>
-          <p:cNvSpPr/>
-          <p:nvPr/>
-        </p:nvSpPr>
-        <p:spPr>
-          <a:xfrm>
-            <a:off x="841247" y="3834638"/>
-            <a:ext cx="365760" cy="365760"/>
-          </a:xfrm>
-          <a:prstGeom prst="roundRect">
-            <a:avLst>
-              <a:gd name="adj" fmla="val 32500"/>
-            </a:avLst>
-          </a:prstGeom>
-          <a:solidFill>
-            <a:srgbClr val="DCF2EF"/>
-          </a:solidFill>
-          <a:ln>
-            <a:noFill/>
-          </a:ln>
-          <a:effectLst/>
-        </p:spPr>
-        <p:style>
-          <a:lnRef idx="1">
-            <a:schemeClr val="accent1"/>
-          </a:lnRef>
-          <a:fillRef idx="3">
-            <a:schemeClr val="accent1"/>
-          </a:fillRef>
-          <a:effectRef idx="2">
-            <a:schemeClr val="accent1"/>
-          </a:effectRef>
-          <a:fontRef idx="minor">
-            <a:schemeClr val="lt1"/>
-          </a:fontRef>
-        </p:style>
-        <p:txBody>
-          <a:bodyPr rtlCol="0" anchor="ctr"/>
-          <a:lstStyle/>
-          <a:p/>
-        </p:txBody>
-      </p:sp>
-      <p:sp>
-        <p:nvSpPr>
-          <p:cNvPr id="18" name="TextBox 17"/>
-          <p:cNvSpPr txBox="1"/>
-          <p:nvPr/>
-        </p:nvSpPr>
-        <p:spPr>
-          <a:xfrm>
-            <a:off x="841247" y="3898646"/>
-            <a:ext cx="365760" cy="256032"/>
-          </a:xfrm>
-          <a:prstGeom prst="rect">
-            <a:avLst/>
-          </a:prstGeom>
-          <a:noFill/>
-        </p:spPr>
-        <p:txBody>
-          <a:bodyPr wrap="square" lIns="0" rIns="0" tIns="0" bIns="0" anchor="t">
-            <a:spAutoFit/>
-          </a:bodyPr>
-          <a:lstStyle/>
-          <a:p>
-            <a:pPr algn="ctr">
-              <a:lnSpc>
-                <a:spcPct val="135000"/>
-              </a:lnSpc>
-            </a:pPr>
-            <a:r>
-              <a:rPr sz="1500" b="1" i="0">
-                <a:solidFill>
-                  <a:srgbClr val="0D7A6F"/>
-                </a:solidFill>
-                <a:latin typeface="Verdana"/>
-              </a:rPr>
-              <a:t>3</a:t>
-            </a:r>
-          </a:p>
-        </p:txBody>
-      </p:sp>
-      <p:sp>
-        <p:nvSpPr>
-          <p:cNvPr id="19" name="TextBox 18"/>
-          <p:cNvSpPr txBox="1"/>
-          <p:nvPr/>
-        </p:nvSpPr>
-        <p:spPr>
-          <a:xfrm>
-            <a:off x="1344168" y="3848608"/>
-            <a:ext cx="10097719" cy="374396"/>
-          </a:xfrm>
-          <a:prstGeom prst="rect">
-            <a:avLst/>
-          </a:prstGeom>
-          <a:noFill/>
-        </p:spPr>
-        <p:txBody>
-          <a:bodyPr wrap="square" lIns="0" rIns="0" tIns="0" bIns="0" anchor="t">
-            <a:spAutoFit/>
-          </a:bodyPr>
-          <a:lstStyle/>
-          <a:p>
-            <a:pPr algn="l">
-              <a:lnSpc>
-                <a:spcPct val="140000"/>
-              </a:lnSpc>
-            </a:pPr>
-            <a:r>
-              <a:rPr sz="1900" b="0" i="0">
-                <a:solidFill>
-                  <a:srgbClr val="3A3D40"/>
-                </a:solidFill>
-                <a:latin typeface="Verdana"/>
-              </a:rPr>
-              <a:t>Il me faut de l'aide.</a:t>
-            </a:r>
-          </a:p>
-        </p:txBody>
-      </p:sp>
-      <p:sp>
-        <p:nvSpPr>
-          <p:cNvPr id="20" name="Rounded Rectangle 19"/>
-          <p:cNvSpPr/>
-          <p:nvPr/>
-        </p:nvSpPr>
-        <p:spPr>
-          <a:xfrm>
-            <a:off x="566928" y="4469892"/>
-            <a:ext cx="11057839" cy="648716"/>
-          </a:xfrm>
-          <a:prstGeom prst="roundRect">
-            <a:avLst>
-              <a:gd name="adj" fmla="val 22552"/>
-            </a:avLst>
-          </a:prstGeom>
-          <a:solidFill>
-            <a:srgbClr val="FFFFFF"/>
-          </a:solidFill>
-          <a:ln w="12700">
-            <a:solidFill>
-              <a:srgbClr val="EAEAE8"/>
-            </a:solidFill>
-          </a:ln>
-          <a:effectLst/>
-        </p:spPr>
-        <p:style>
-          <a:lnRef idx="1">
-            <a:schemeClr val="accent1"/>
-          </a:lnRef>
-          <a:fillRef idx="3">
-            <a:schemeClr val="accent1"/>
-          </a:fillRef>
-          <a:effectRef idx="2">
-            <a:schemeClr val="accent1"/>
-          </a:effectRef>
-          <a:fontRef idx="minor">
-            <a:schemeClr val="lt1"/>
-          </a:fontRef>
-        </p:style>
-        <p:txBody>
-          <a:bodyPr rtlCol="0" anchor="ctr"/>
-          <a:lstStyle/>
-          <a:p/>
-        </p:txBody>
-      </p:sp>
-      <p:sp>
-        <p:nvSpPr>
-          <p:cNvPr id="21" name="Rounded Rectangle 20"/>
-          <p:cNvSpPr/>
-          <p:nvPr/>
-        </p:nvSpPr>
-        <p:spPr>
-          <a:xfrm>
-            <a:off x="841247" y="4611370"/>
-            <a:ext cx="365760" cy="365760"/>
-          </a:xfrm>
-          <a:prstGeom prst="roundRect">
-            <a:avLst>
-              <a:gd name="adj" fmla="val 32500"/>
-            </a:avLst>
-          </a:prstGeom>
-          <a:solidFill>
-            <a:srgbClr val="DCF2EF"/>
-          </a:solidFill>
-          <a:ln>
-            <a:noFill/>
-          </a:ln>
-          <a:effectLst/>
-        </p:spPr>
-        <p:style>
-          <a:lnRef idx="1">
-            <a:schemeClr val="accent1"/>
-          </a:lnRef>
-          <a:fillRef idx="3">
-            <a:schemeClr val="accent1"/>
-          </a:fillRef>
-          <a:effectRef idx="2">
-            <a:schemeClr val="accent1"/>
-          </a:effectRef>
-          <a:fontRef idx="minor">
-            <a:schemeClr val="lt1"/>
-          </a:fontRef>
-        </p:style>
-        <p:txBody>
-          <a:bodyPr rtlCol="0" anchor="ctr"/>
-          <a:lstStyle/>
-          <a:p/>
-        </p:txBody>
-      </p:sp>
-      <p:sp>
-        <p:nvSpPr>
-          <p:cNvPr id="22" name="TextBox 21"/>
-          <p:cNvSpPr txBox="1"/>
-          <p:nvPr/>
-        </p:nvSpPr>
-        <p:spPr>
-          <a:xfrm>
-            <a:off x="841247" y="4675378"/>
-            <a:ext cx="365760" cy="256032"/>
-          </a:xfrm>
-          <a:prstGeom prst="rect">
-            <a:avLst/>
-          </a:prstGeom>
-          <a:noFill/>
-        </p:spPr>
-        <p:txBody>
-          <a:bodyPr wrap="square" lIns="0" rIns="0" tIns="0" bIns="0" anchor="t">
-            <a:spAutoFit/>
-          </a:bodyPr>
-          <a:lstStyle/>
-          <a:p>
-            <a:pPr algn="ctr">
-              <a:lnSpc>
-                <a:spcPct val="135000"/>
-              </a:lnSpc>
-            </a:pPr>
-            <a:r>
-              <a:rPr sz="1500" b="1" i="0">
-                <a:solidFill>
-                  <a:srgbClr val="0D7A6F"/>
-                </a:solidFill>
-                <a:latin typeface="Verdana"/>
-              </a:rPr>
-              <a:t>4</a:t>
-            </a:r>
-          </a:p>
-        </p:txBody>
-      </p:sp>
-      <p:sp>
-        <p:nvSpPr>
-          <p:cNvPr id="23" name="TextBox 22"/>
-          <p:cNvSpPr txBox="1"/>
-          <p:nvPr/>
-        </p:nvSpPr>
-        <p:spPr>
-          <a:xfrm>
-            <a:off x="1344168" y="4625340"/>
-            <a:ext cx="10097719" cy="374396"/>
-          </a:xfrm>
-          <a:prstGeom prst="rect">
-            <a:avLst/>
-          </a:prstGeom>
-          <a:noFill/>
-        </p:spPr>
-        <p:txBody>
-          <a:bodyPr wrap="square" lIns="0" rIns="0" tIns="0" bIns="0" anchor="t">
-            <a:spAutoFit/>
-          </a:bodyPr>
-          <a:lstStyle/>
-          <a:p>
-            <a:pPr algn="l">
-              <a:lnSpc>
-                <a:spcPct val="140000"/>
-              </a:lnSpc>
-            </a:pPr>
-            <a:r>
-              <a:rPr sz="1900" b="0" i="0">
-                <a:solidFill>
-                  <a:srgbClr val="3A3D40"/>
-                </a:solidFill>
-                <a:latin typeface="Verdana"/>
-              </a:rPr>
-              <a:t>Nous voulons des explications.</a:t>
+              <a:rPr sz="2000" b="0" i="0">
+                <a:solidFill>
+                  <a:srgbClr val="4B4F52"/>
+                </a:solidFill>
+                <a:latin typeface="Verdana"/>
+              </a:rPr>
+              <a:t>« Besoin » est un nom, pas un verbe. Il lui faut « avoir » devant : j'ai, tu as, il a, nous avons, vous avez, ils ont.</a:t>
             </a:r>
           </a:p>
         </p:txBody>
